--- a/01-项目实践/机械革命项目/穴位识别算法/初稿/流程图绘制模板4.0.pptx
+++ b/01-项目实践/机械革命项目/穴位识别算法/初稿/流程图绘制模板4.0.pptx
@@ -14484,30 +14484,619 @@
         <p:nvPr/>
       </p:nvGrpSpPr>
       <p:grpSpPr/>
+      <p:grpSp>
+        <p:nvGrpSpPr>
+          <p:cNvPr id="5" name="组合 4"/>
+          <p:cNvGrpSpPr/>
+          <p:nvPr/>
+        </p:nvGrpSpPr>
+        <p:grpSpPr>
+          <a:xfrm rot="16200000">
+            <a:off x="-990600" y="2174875"/>
+            <a:ext cx="6590665" cy="2585720"/>
+            <a:chOff x="2963" y="7316"/>
+            <a:chExt cx="9929" cy="4072"/>
+          </a:xfrm>
+        </p:grpSpPr>
+        <p:sp>
+          <p:nvSpPr>
+            <p:cNvPr id="220" name="圆角矩形 219"/>
+            <p:cNvSpPr/>
+            <p:nvPr/>
+          </p:nvSpPr>
+          <p:spPr>
+            <a:xfrm>
+              <a:off x="2963" y="7316"/>
+              <a:ext cx="9929" cy="4072"/>
+            </a:xfrm>
+            <a:prstGeom prst="roundRect">
+              <a:avLst/>
+            </a:prstGeom>
+            <a:solidFill>
+              <a:srgbClr val="FFD966"/>
+            </a:solidFill>
+          </p:spPr>
+          <p:style>
+            <a:lnRef idx="2">
+              <a:schemeClr val="accent1">
+                <a:lumMod val="75000"/>
+              </a:schemeClr>
+            </a:lnRef>
+            <a:fillRef idx="1">
+              <a:schemeClr val="accent1"/>
+            </a:fillRef>
+            <a:effectRef idx="0">
+              <a:srgbClr val="FFFFFF"/>
+            </a:effectRef>
+            <a:fontRef idx="minor">
+              <a:schemeClr val="lt1"/>
+            </a:fontRef>
+          </p:style>
+          <p:txBody>
+            <a:bodyPr rtlCol="0" anchor="ctr"/>
+            <a:p>
+              <a:pPr algn="ctr"/>
+              <a:endParaRPr lang="zh-CN" altLang="en-US"/>
+            </a:p>
+          </p:txBody>
+        </p:sp>
+        <p:sp>
+          <p:nvSpPr>
+            <p:cNvPr id="224" name="圆角矩形 223"/>
+            <p:cNvSpPr/>
+            <p:nvPr/>
+          </p:nvSpPr>
+          <p:spPr>
+            <a:xfrm rot="5400000">
+              <a:off x="7596" y="7841"/>
+              <a:ext cx="665" cy="2906"/>
+            </a:xfrm>
+            <a:prstGeom prst="roundRect">
+              <a:avLst/>
+            </a:prstGeom>
+            <a:solidFill>
+              <a:schemeClr val="accent2"/>
+            </a:solidFill>
+          </p:spPr>
+          <p:style>
+            <a:lnRef idx="2">
+              <a:schemeClr val="accent1">
+                <a:lumMod val="75000"/>
+              </a:schemeClr>
+            </a:lnRef>
+            <a:fillRef idx="1">
+              <a:schemeClr val="accent1"/>
+            </a:fillRef>
+            <a:effectRef idx="0">
+              <a:srgbClr val="FFFFFF"/>
+            </a:effectRef>
+            <a:fontRef idx="minor">
+              <a:schemeClr val="lt1"/>
+            </a:fontRef>
+          </p:style>
+          <p:txBody>
+            <a:bodyPr rtlCol="0" anchor="ctr"/>
+            <a:p>
+              <a:pPr algn="ctr"/>
+              <a:r>
+                <a:rPr lang="zh-CN" altLang="en-US"/>
+                <a:t>全身姿态</a:t>
+              </a:r>
+              <a:r>
+                <a:rPr lang="en-US" altLang="zh-CN"/>
+                <a:t>+</a:t>
+              </a:r>
+              <a:endParaRPr lang="en-US" altLang="zh-CN"/>
+            </a:p>
+            <a:p>
+              <a:pPr algn="ctr"/>
+              <a:r>
+                <a:rPr lang="zh-CN" altLang="en-US"/>
+                <a:t>膝</a:t>
+              </a:r>
+              <a:r>
+                <a:rPr lang="zh-CN" altLang="en-US"/>
+                <a:t>模</a:t>
+              </a:r>
+              <a:endParaRPr lang="zh-CN" altLang="en-US"/>
+            </a:p>
+          </p:txBody>
+        </p:sp>
+        <p:cxnSp>
+          <p:nvCxnSpPr>
+            <p:cNvPr id="226" name="直接箭头连接符 225"/>
+            <p:cNvCxnSpPr>
+              <a:stCxn id="230" idx="3"/>
+              <a:endCxn id="224" idx="1"/>
+            </p:cNvCxnSpPr>
+            <p:nvPr/>
+          </p:nvCxnSpPr>
+          <p:spPr>
+            <a:xfrm flipH="1">
+              <a:off x="7929" y="8162"/>
+              <a:ext cx="12" cy="800"/>
+            </a:xfrm>
+            <a:prstGeom prst="straightConnector1">
+              <a:avLst/>
+            </a:prstGeom>
+            <a:ln>
+              <a:tailEnd type="arrow" w="med" len="med"/>
+            </a:ln>
+          </p:spPr>
+          <p:style>
+            <a:lnRef idx="3">
+              <a:schemeClr val="accent1"/>
+            </a:lnRef>
+            <a:fillRef idx="0">
+              <a:srgbClr val="FFFFFF"/>
+            </a:fillRef>
+            <a:effectRef idx="0">
+              <a:srgbClr val="FFFFFF"/>
+            </a:effectRef>
+            <a:fontRef idx="minor">
+              <a:schemeClr val="tx1"/>
+            </a:fontRef>
+          </p:style>
+        </p:cxnSp>
+        <p:sp>
+          <p:nvSpPr>
+            <p:cNvPr id="230" name="圆角矩形 229"/>
+            <p:cNvSpPr/>
+            <p:nvPr/>
+          </p:nvSpPr>
+          <p:spPr>
+            <a:xfrm rot="5400000">
+              <a:off x="7617" y="6902"/>
+              <a:ext cx="648" cy="1871"/>
+            </a:xfrm>
+            <a:prstGeom prst="roundRect">
+              <a:avLst/>
+            </a:prstGeom>
+            <a:solidFill>
+              <a:schemeClr val="accent6"/>
+            </a:solidFill>
+          </p:spPr>
+          <p:style>
+            <a:lnRef idx="2">
+              <a:schemeClr val="accent1">
+                <a:lumMod val="75000"/>
+              </a:schemeClr>
+            </a:lnRef>
+            <a:fillRef idx="1">
+              <a:schemeClr val="accent1"/>
+            </a:fillRef>
+            <a:effectRef idx="0">
+              <a:srgbClr val="FFFFFF"/>
+            </a:effectRef>
+            <a:fontRef idx="minor">
+              <a:schemeClr val="lt1"/>
+            </a:fontRef>
+          </p:style>
+          <p:txBody>
+            <a:bodyPr rtlCol="0" anchor="ctr"/>
+            <a:p>
+              <a:pPr algn="ctr"/>
+              <a:r>
+                <a:rPr lang="zh-CN" altLang="en-US"/>
+                <a:t>输入</a:t>
+              </a:r>
+              <a:endParaRPr lang="zh-CN" altLang="en-US"/>
+            </a:p>
+          </p:txBody>
+        </p:sp>
+        <p:cxnSp>
+          <p:nvCxnSpPr>
+            <p:cNvPr id="231" name="肘形连接符 230"/>
+            <p:cNvCxnSpPr>
+              <a:endCxn id="6" idx="1"/>
+            </p:cNvCxnSpPr>
+            <p:nvPr/>
+          </p:nvCxnSpPr>
+          <p:spPr>
+            <a:xfrm>
+              <a:off x="7936" y="8474"/>
+              <a:ext cx="3228" cy="485"/>
+            </a:xfrm>
+            <a:prstGeom prst="bentConnector2">
+              <a:avLst/>
+            </a:prstGeom>
+            <a:ln>
+              <a:tailEnd type="arrow" w="med" len="med"/>
+            </a:ln>
+          </p:spPr>
+          <p:style>
+            <a:lnRef idx="3">
+              <a:schemeClr val="accent1"/>
+            </a:lnRef>
+            <a:fillRef idx="0">
+              <a:srgbClr val="FFFFFF"/>
+            </a:fillRef>
+            <a:effectRef idx="0">
+              <a:srgbClr val="FFFFFF"/>
+            </a:effectRef>
+            <a:fontRef idx="minor">
+              <a:schemeClr val="tx1"/>
+            </a:fontRef>
+          </p:style>
+        </p:cxnSp>
+        <p:cxnSp>
+          <p:nvCxnSpPr>
+            <p:cNvPr id="232" name="肘形连接符 231"/>
+            <p:cNvCxnSpPr>
+              <a:endCxn id="7" idx="1"/>
+            </p:cNvCxnSpPr>
+            <p:nvPr/>
+          </p:nvCxnSpPr>
+          <p:spPr>
+            <a:xfrm rot="10800000" flipV="1">
+              <a:off x="4705" y="8475"/>
+              <a:ext cx="3240" cy="485"/>
+            </a:xfrm>
+            <a:prstGeom prst="bentConnector2">
+              <a:avLst/>
+            </a:prstGeom>
+            <a:ln>
+              <a:tailEnd type="arrow" w="med" len="med"/>
+            </a:ln>
+          </p:spPr>
+          <p:style>
+            <a:lnRef idx="3">
+              <a:schemeClr val="accent1"/>
+            </a:lnRef>
+            <a:fillRef idx="0">
+              <a:srgbClr val="FFFFFF"/>
+            </a:fillRef>
+            <a:effectRef idx="0">
+              <a:srgbClr val="FFFFFF"/>
+            </a:effectRef>
+            <a:fontRef idx="minor">
+              <a:schemeClr val="tx1"/>
+            </a:fontRef>
+          </p:style>
+        </p:cxnSp>
+        <p:sp>
+          <p:nvSpPr>
+            <p:cNvPr id="233" name="圆角矩形 232"/>
+            <p:cNvSpPr/>
+            <p:nvPr/>
+          </p:nvSpPr>
+          <p:spPr>
+            <a:xfrm rot="5400000">
+              <a:off x="7610" y="9946"/>
+              <a:ext cx="649" cy="1761"/>
+            </a:xfrm>
+            <a:prstGeom prst="roundRect">
+              <a:avLst/>
+            </a:prstGeom>
+            <a:solidFill>
+              <a:schemeClr val="accent6"/>
+            </a:solidFill>
+          </p:spPr>
+          <p:style>
+            <a:lnRef idx="2">
+              <a:schemeClr val="accent1">
+                <a:lumMod val="75000"/>
+              </a:schemeClr>
+            </a:lnRef>
+            <a:fillRef idx="1">
+              <a:schemeClr val="accent1"/>
+            </a:fillRef>
+            <a:effectRef idx="0">
+              <a:srgbClr val="FFFFFF"/>
+            </a:effectRef>
+            <a:fontRef idx="minor">
+              <a:schemeClr val="lt1"/>
+            </a:fontRef>
+          </p:style>
+          <p:txBody>
+            <a:bodyPr rtlCol="0" anchor="ctr"/>
+            <a:p>
+              <a:pPr algn="ctr"/>
+              <a:r>
+                <a:rPr lang="zh-CN" altLang="en-US"/>
+                <a:t>输</a:t>
+              </a:r>
+              <a:r>
+                <a:rPr lang="zh-CN" altLang="en-US"/>
+                <a:t>出</a:t>
+              </a:r>
+              <a:endParaRPr lang="zh-CN" altLang="en-US"/>
+            </a:p>
+          </p:txBody>
+        </p:sp>
+        <p:sp>
+          <p:nvSpPr>
+            <p:cNvPr id="240" name="流程图: 汇总连接 239"/>
+            <p:cNvSpPr/>
+            <p:nvPr/>
+          </p:nvSpPr>
+          <p:spPr>
+            <a:xfrm>
+              <a:off x="7798" y="9891"/>
+              <a:ext cx="269" cy="235"/>
+            </a:xfrm>
+            <a:prstGeom prst="flowChartSummingJunction">
+              <a:avLst/>
+            </a:prstGeom>
+            <a:noFill/>
+            <a:ln>
+              <a:solidFill>
+                <a:schemeClr val="tx1"/>
+              </a:solidFill>
+            </a:ln>
+          </p:spPr>
+          <p:style>
+            <a:lnRef idx="2">
+              <a:schemeClr val="accent1">
+                <a:shade val="50000"/>
+              </a:schemeClr>
+            </a:lnRef>
+            <a:fillRef idx="1">
+              <a:schemeClr val="accent1"/>
+            </a:fillRef>
+            <a:effectRef idx="0">
+              <a:schemeClr val="accent1"/>
+            </a:effectRef>
+            <a:fontRef idx="minor">
+              <a:schemeClr val="lt1"/>
+            </a:fontRef>
+          </p:style>
+          <p:txBody>
+            <a:bodyPr rtlCol="0" anchor="ctr"/>
+            <a:lstStyle/>
+            <a:p>
+              <a:pPr algn="ctr"/>
+              <a:endParaRPr lang="zh-CN" altLang="en-US" sz="2115">
+                <a:latin typeface="Times New Roman" panose="02020603050405020304" charset="0"/>
+                <a:cs typeface="Times New Roman" panose="02020603050405020304" charset="0"/>
+              </a:endParaRPr>
+            </a:p>
+          </p:txBody>
+        </p:sp>
+        <p:cxnSp>
+          <p:nvCxnSpPr>
+            <p:cNvPr id="247" name="直接箭头连接符 246"/>
+            <p:cNvCxnSpPr>
+              <a:stCxn id="240" idx="4"/>
+              <a:endCxn id="233" idx="1"/>
+            </p:cNvCxnSpPr>
+            <p:nvPr/>
+          </p:nvCxnSpPr>
+          <p:spPr>
+            <a:xfrm>
+              <a:off x="7933" y="10127"/>
+              <a:ext cx="1" cy="376"/>
+            </a:xfrm>
+            <a:prstGeom prst="straightConnector1">
+              <a:avLst/>
+            </a:prstGeom>
+            <a:ln>
+              <a:tailEnd type="arrow" w="med" len="med"/>
+            </a:ln>
+          </p:spPr>
+          <p:style>
+            <a:lnRef idx="3">
+              <a:schemeClr val="accent1"/>
+            </a:lnRef>
+            <a:fillRef idx="0">
+              <a:srgbClr val="FFFFFF"/>
+            </a:fillRef>
+            <a:effectRef idx="0">
+              <a:srgbClr val="FFFFFF"/>
+            </a:effectRef>
+            <a:fontRef idx="minor">
+              <a:schemeClr val="tx1"/>
+            </a:fontRef>
+          </p:style>
+        </p:cxnSp>
+        <p:cxnSp>
+          <p:nvCxnSpPr>
+            <p:cNvPr id="248" name="直接连接符 247"/>
+            <p:cNvCxnSpPr>
+              <a:stCxn id="224" idx="3"/>
+              <a:endCxn id="240" idx="0"/>
+            </p:cNvCxnSpPr>
+            <p:nvPr/>
+          </p:nvCxnSpPr>
+          <p:spPr>
+            <a:xfrm>
+              <a:off x="7928" y="9627"/>
+              <a:ext cx="5" cy="265"/>
+            </a:xfrm>
+            <a:prstGeom prst="line">
+              <a:avLst/>
+            </a:prstGeom>
+          </p:spPr>
+          <p:style>
+            <a:lnRef idx="3">
+              <a:schemeClr val="accent1"/>
+            </a:lnRef>
+            <a:fillRef idx="0">
+              <a:srgbClr val="FFFFFF"/>
+            </a:fillRef>
+            <a:effectRef idx="0">
+              <a:srgbClr val="FFFFFF"/>
+            </a:effectRef>
+            <a:fontRef idx="minor">
+              <a:schemeClr val="tx1"/>
+            </a:fontRef>
+          </p:style>
+        </p:cxnSp>
+        <p:cxnSp>
+          <p:nvCxnSpPr>
+            <p:cNvPr id="250" name="肘形连接符 249"/>
+            <p:cNvCxnSpPr>
+              <a:stCxn id="7" idx="3"/>
+              <a:endCxn id="240" idx="2"/>
+            </p:cNvCxnSpPr>
+            <p:nvPr/>
+          </p:nvCxnSpPr>
+          <p:spPr>
+            <a:xfrm rot="5400000" flipV="1">
+              <a:off x="6058" y="8270"/>
+              <a:ext cx="385" cy="3095"/>
+            </a:xfrm>
+            <a:prstGeom prst="bentConnector2">
+              <a:avLst/>
+            </a:prstGeom>
+          </p:spPr>
+          <p:style>
+            <a:lnRef idx="3">
+              <a:schemeClr val="accent1"/>
+            </a:lnRef>
+            <a:fillRef idx="0">
+              <a:srgbClr val="FFFFFF"/>
+            </a:fillRef>
+            <a:effectRef idx="0">
+              <a:srgbClr val="FFFFFF"/>
+            </a:effectRef>
+            <a:fontRef idx="minor">
+              <a:schemeClr val="tx1"/>
+            </a:fontRef>
+          </p:style>
+        </p:cxnSp>
+        <p:cxnSp>
+          <p:nvCxnSpPr>
+            <p:cNvPr id="251" name="肘形连接符 250"/>
+            <p:cNvCxnSpPr>
+              <a:stCxn id="6" idx="3"/>
+              <a:endCxn id="240" idx="6"/>
+            </p:cNvCxnSpPr>
+            <p:nvPr/>
+          </p:nvCxnSpPr>
+          <p:spPr>
+            <a:xfrm rot="5400000">
+              <a:off x="9423" y="8269"/>
+              <a:ext cx="385" cy="3097"/>
+            </a:xfrm>
+            <a:prstGeom prst="bentConnector2">
+              <a:avLst/>
+            </a:prstGeom>
+          </p:spPr>
+          <p:style>
+            <a:lnRef idx="3">
+              <a:schemeClr val="accent1"/>
+            </a:lnRef>
+            <a:fillRef idx="0">
+              <a:srgbClr val="FFFFFF"/>
+            </a:fillRef>
+            <a:effectRef idx="0">
+              <a:srgbClr val="FFFFFF"/>
+            </a:effectRef>
+            <a:fontRef idx="minor">
+              <a:schemeClr val="tx1"/>
+            </a:fontRef>
+          </p:style>
+        </p:cxnSp>
+        <p:sp>
+          <p:nvSpPr>
+            <p:cNvPr id="2" name="文本框 1"/>
+            <p:cNvSpPr txBox="1"/>
+            <p:nvPr/>
+          </p:nvSpPr>
+          <p:spPr>
+            <a:xfrm rot="5400000">
+              <a:off x="3906" y="8141"/>
+              <a:ext cx="545" cy="988"/>
+            </a:xfrm>
+            <a:prstGeom prst="rect">
+              <a:avLst/>
+            </a:prstGeom>
+            <a:noFill/>
+          </p:spPr>
+          <p:txBody>
+            <a:bodyPr wrap="square" rtlCol="0">
+              <a:noAutofit/>
+            </a:bodyPr>
+            <a:p>
+              <a:r>
+                <a:rPr lang="zh-CN" altLang="en-US"/>
+                <a:t>背</a:t>
+              </a:r>
+              <a:r>
+                <a:rPr lang="zh-CN" altLang="en-US"/>
+                <a:t>部</a:t>
+              </a:r>
+              <a:endParaRPr lang="zh-CN" altLang="en-US"/>
+            </a:p>
+          </p:txBody>
+        </p:sp>
+        <p:sp>
+          <p:nvSpPr>
+            <p:cNvPr id="3" name="文本框 2"/>
+            <p:cNvSpPr txBox="1"/>
+            <p:nvPr/>
+          </p:nvSpPr>
+          <p:spPr>
+            <a:xfrm rot="5400000">
+              <a:off x="7125" y="8140"/>
+              <a:ext cx="526" cy="1018"/>
+            </a:xfrm>
+            <a:prstGeom prst="rect">
+              <a:avLst/>
+            </a:prstGeom>
+            <a:noFill/>
+          </p:spPr>
+          <p:txBody>
+            <a:bodyPr wrap="square" rtlCol="0">
+              <a:noAutofit/>
+            </a:bodyPr>
+            <a:p>
+              <a:r>
+                <a:rPr lang="zh-CN" altLang="en-US"/>
+                <a:t>膝部</a:t>
+              </a:r>
+              <a:endParaRPr lang="zh-CN" altLang="en-US"/>
+            </a:p>
+          </p:txBody>
+        </p:sp>
+        <p:sp>
+          <p:nvSpPr>
+            <p:cNvPr id="4" name="文本框 3"/>
+            <p:cNvSpPr txBox="1"/>
+            <p:nvPr/>
+          </p:nvSpPr>
+          <p:spPr>
+            <a:xfrm rot="5400000">
+              <a:off x="11269" y="8084"/>
+              <a:ext cx="558" cy="1176"/>
+            </a:xfrm>
+            <a:prstGeom prst="rect">
+              <a:avLst/>
+            </a:prstGeom>
+            <a:noFill/>
+          </p:spPr>
+          <p:txBody>
+            <a:bodyPr wrap="square" rtlCol="0">
+              <a:noAutofit/>
+            </a:bodyPr>
+            <a:p>
+              <a:r>
+                <a:rPr lang="zh-CN" altLang="en-US"/>
+                <a:t>脐部</a:t>
+              </a:r>
+              <a:endParaRPr lang="zh-CN" altLang="en-US"/>
+            </a:p>
+          </p:txBody>
+        </p:sp>
+      </p:grpSp>
       <p:sp>
         <p:nvSpPr>
-          <p:cNvPr id="151" name="圆角矩形 150"/>
+          <p:cNvPr id="6" name="圆角矩形 5"/>
           <p:cNvSpPr/>
           <p:nvPr/>
         </p:nvSpPr>
         <p:spPr>
           <a:xfrm>
-            <a:off x="10697210" y="706755"/>
-            <a:ext cx="4768850" cy="6149340"/>
+            <a:off x="2055495" y="285115"/>
+            <a:ext cx="422275" cy="2068195"/>
           </a:xfrm>
           <a:prstGeom prst="roundRect">
-            <a:avLst>
-              <a:gd name="adj" fmla="val 11171"/>
-            </a:avLst>
+            <a:avLst/>
           </a:prstGeom>
           <a:solidFill>
-            <a:srgbClr val="BBDDDF"/>
+            <a:schemeClr val="accent2"/>
           </a:solidFill>
-          <a:ln>
-            <a:solidFill>
-              <a:schemeClr val="tx1"/>
-            </a:solidFill>
-          </a:ln>
         </p:spPr>
         <p:style>
           <a:lnRef idx="2">
@@ -14529,47 +15118,45 @@
           <a:bodyPr rtlCol="0" anchor="ctr"/>
           <a:p>
             <a:pPr algn="ctr"/>
-            <a:endParaRPr lang="zh-CN" altLang="en-US" sz="1760">
-              <a:latin typeface="Times New Roman" panose="02020603050405020304" charset="0"/>
-              <a:cs typeface="Times New Roman" panose="02020603050405020304" charset="0"/>
-            </a:endParaRPr>
+            <a:r>
+              <a:rPr lang="zh-CN" altLang="en-US">
+                <a:sym typeface="+mn-ea"/>
+              </a:rPr>
+              <a:t>全身姿态+脐点</a:t>
+            </a:r>
+            <a:endParaRPr lang="zh-CN" altLang="en-US"/>
           </a:p>
         </p:txBody>
       </p:sp>
       <p:sp>
         <p:nvSpPr>
-          <p:cNvPr id="152" name="矩形 151"/>
+          <p:cNvPr id="7" name="圆角矩形 6"/>
           <p:cNvSpPr/>
           <p:nvPr/>
         </p:nvSpPr>
         <p:spPr>
-          <a:xfrm flipH="1">
-            <a:off x="11829415" y="3091815"/>
-            <a:ext cx="461645" cy="200025"/>
+          <a:xfrm>
+            <a:off x="2055495" y="4573270"/>
+            <a:ext cx="422275" cy="2068195"/>
           </a:xfrm>
-          <a:prstGeom prst="rect">
+          <a:prstGeom prst="roundRect">
             <a:avLst/>
           </a:prstGeom>
           <a:solidFill>
-            <a:srgbClr val="EDD88B"/>
+            <a:schemeClr val="accent2"/>
           </a:solidFill>
-          <a:ln>
-            <a:solidFill>
-              <a:schemeClr val="tx1"/>
-            </a:solidFill>
-          </a:ln>
         </p:spPr>
         <p:style>
           <a:lnRef idx="2">
             <a:schemeClr val="accent1">
-              <a:shade val="50000"/>
+              <a:lumMod val="75000"/>
             </a:schemeClr>
           </a:lnRef>
           <a:fillRef idx="1">
             <a:schemeClr val="accent1"/>
           </a:fillRef>
           <a:effectRef idx="0">
-            <a:schemeClr val="accent1"/>
+            <a:srgbClr val="FFFFFF"/>
           </a:effectRef>
           <a:fontRef idx="minor">
             <a:schemeClr val="lt1"/>
@@ -14580,1537 +15167,12 @@
           <a:p>
             <a:pPr algn="ctr"/>
             <a:r>
-              <a:rPr lang="en-US" altLang="zh-CN" sz="1400" dirty="0">
-                <a:solidFill>
-                  <a:schemeClr val="tx1"/>
-                </a:solidFill>
-                <a:latin typeface="Times New Roman" panose="02020603050405020304" charset="0"/>
-                <a:cs typeface="Times New Roman" panose="02020603050405020304" charset="0"/>
-              </a:rPr>
-              <a:t>Yes</a:t>
-            </a:r>
-            <a:endParaRPr lang="en-US" altLang="zh-CN" sz="1400" dirty="0">
-              <a:solidFill>
-                <a:schemeClr val="tx1"/>
-              </a:solidFill>
-              <a:latin typeface="Times New Roman" panose="02020603050405020304" charset="0"/>
-              <a:cs typeface="Times New Roman" panose="02020603050405020304" charset="0"/>
-            </a:endParaRPr>
-          </a:p>
-        </p:txBody>
-      </p:sp>
-      <p:sp>
-        <p:nvSpPr>
-          <p:cNvPr id="158" name="矩形: 圆角 29"/>
-          <p:cNvSpPr/>
-          <p:nvPr/>
-        </p:nvSpPr>
-        <p:spPr>
-          <a:xfrm rot="5400000">
-            <a:off x="11921490" y="3684270"/>
-            <a:ext cx="253365" cy="1019175"/>
-          </a:xfrm>
-          <a:prstGeom prst="roundRect">
-            <a:avLst/>
-          </a:prstGeom>
-          <a:solidFill>
-            <a:srgbClr val="F4B183"/>
-          </a:solidFill>
-          <a:ln>
-            <a:solidFill>
-              <a:schemeClr val="tx1"/>
-            </a:solidFill>
-          </a:ln>
-        </p:spPr>
-        <p:style>
-          <a:lnRef idx="2">
-            <a:schemeClr val="accent1">
-              <a:shade val="50000"/>
-            </a:schemeClr>
-          </a:lnRef>
-          <a:fillRef idx="1">
-            <a:schemeClr val="accent1"/>
-          </a:fillRef>
-          <a:effectRef idx="0">
-            <a:schemeClr val="accent1"/>
-          </a:effectRef>
-          <a:fontRef idx="minor">
-            <a:schemeClr val="lt1"/>
-          </a:fontRef>
-        </p:style>
-        <p:txBody>
-          <a:bodyPr vert="vert270" rtlCol="0" anchor="ctr"/>
-          <a:p>
-            <a:pPr algn="ctr">
-              <a:buClrTx/>
-              <a:buSzTx/>
-              <a:buFontTx/>
-            </a:pPr>
-            <a:r>
-              <a:rPr lang="en-US" altLang="zh-CN" sz="1170" dirty="0">
-                <a:solidFill>
-                  <a:schemeClr val="tx1"/>
-                </a:solidFill>
-                <a:latin typeface="Times New Roman" panose="02020603050405020304" charset="0"/>
-                <a:cs typeface="Times New Roman" panose="02020603050405020304" charset="0"/>
+              <a:rPr lang="zh-CN" altLang="en-US">
                 <a:sym typeface="+mn-ea"/>
               </a:rPr>
-              <a:t>PIDController</a:t>
+              <a:t>全身姿态+颈点</a:t>
             </a:r>
-            <a:endParaRPr lang="en-US" altLang="zh-CN" sz="1170" dirty="0">
-              <a:solidFill>
-                <a:schemeClr val="tx1"/>
-              </a:solidFill>
-              <a:latin typeface="Times New Roman" panose="02020603050405020304" charset="0"/>
-              <a:cs typeface="Times New Roman" panose="02020603050405020304" charset="0"/>
-              <a:sym typeface="+mn-ea"/>
-            </a:endParaRPr>
-          </a:p>
-        </p:txBody>
-      </p:sp>
-      <p:sp>
-        <p:nvSpPr>
-          <p:cNvPr id="162" name="矩形: 圆角 30"/>
-          <p:cNvSpPr/>
-          <p:nvPr/>
-        </p:nvSpPr>
-        <p:spPr>
-          <a:xfrm rot="5400000">
-            <a:off x="13901420" y="5403850"/>
-            <a:ext cx="253365" cy="973455"/>
-          </a:xfrm>
-          <a:prstGeom prst="roundRect">
-            <a:avLst/>
-          </a:prstGeom>
-          <a:solidFill>
-            <a:schemeClr val="accent4">
-              <a:lumMod val="60000"/>
-              <a:lumOff val="40000"/>
-            </a:schemeClr>
-          </a:solidFill>
-          <a:ln>
-            <a:solidFill>
-              <a:schemeClr val="tx1"/>
-            </a:solidFill>
-          </a:ln>
-        </p:spPr>
-        <p:style>
-          <a:lnRef idx="2">
-            <a:schemeClr val="accent4">
-              <a:shade val="50000"/>
-            </a:schemeClr>
-          </a:lnRef>
-          <a:fillRef idx="1">
-            <a:schemeClr val="accent4"/>
-          </a:fillRef>
-          <a:effectRef idx="0">
-            <a:schemeClr val="accent4"/>
-          </a:effectRef>
-          <a:fontRef idx="minor">
-            <a:schemeClr val="lt1"/>
-          </a:fontRef>
-        </p:style>
-        <p:txBody>
-          <a:bodyPr vert="vert270" rtlCol="0" anchor="ctr"/>
-          <a:p>
-            <a:pPr algn="ctr">
-              <a:buClrTx/>
-              <a:buSzTx/>
-              <a:buFontTx/>
-            </a:pPr>
-            <a:r>
-              <a:rPr lang="en-US" altLang="zh-CN" sz="1170" dirty="0">
-                <a:solidFill>
-                  <a:schemeClr val="tx1"/>
-                </a:solidFill>
-                <a:latin typeface="Times New Roman" panose="02020603050405020304" charset="0"/>
-                <a:cs typeface="Times New Roman" panose="02020603050405020304" charset="0"/>
-              </a:rPr>
-              <a:t>C</a:t>
-            </a:r>
-            <a:r>
-              <a:rPr lang="en-US" altLang="zh-CN" sz="1170" dirty="0">
-                <a:solidFill>
-                  <a:schemeClr val="tx1"/>
-                </a:solidFill>
-                <a:latin typeface="Times New Roman" panose="02020603050405020304" charset="0"/>
-                <a:cs typeface="Times New Roman" panose="02020603050405020304" charset="0"/>
-              </a:rPr>
-              <a:t>onnect</a:t>
-            </a:r>
-            <a:endParaRPr lang="en-US" altLang="zh-CN" sz="1170" dirty="0">
-              <a:solidFill>
-                <a:schemeClr val="tx1"/>
-              </a:solidFill>
-              <a:latin typeface="Times New Roman" panose="02020603050405020304" charset="0"/>
-              <a:cs typeface="Times New Roman" panose="02020603050405020304" charset="0"/>
-            </a:endParaRPr>
-          </a:p>
-        </p:txBody>
-      </p:sp>
-      <p:sp>
-        <p:nvSpPr>
-          <p:cNvPr id="164" name="矩形: 圆角 31"/>
-          <p:cNvSpPr/>
-          <p:nvPr/>
-        </p:nvSpPr>
-        <p:spPr>
-          <a:xfrm rot="5400000">
-            <a:off x="11924665" y="3221355"/>
-            <a:ext cx="252730" cy="911225"/>
-          </a:xfrm>
-          <a:prstGeom prst="roundRect">
-            <a:avLst/>
-          </a:prstGeom>
-          <a:solidFill>
-            <a:schemeClr val="accent3"/>
-          </a:solidFill>
-          <a:ln>
-            <a:solidFill>
-              <a:schemeClr val="tx1"/>
-            </a:solidFill>
-          </a:ln>
-        </p:spPr>
-        <p:style>
-          <a:lnRef idx="2">
-            <a:schemeClr val="accent1">
-              <a:shade val="50000"/>
-            </a:schemeClr>
-          </a:lnRef>
-          <a:fillRef idx="1">
-            <a:schemeClr val="accent1"/>
-          </a:fillRef>
-          <a:effectRef idx="0">
-            <a:schemeClr val="accent1"/>
-          </a:effectRef>
-          <a:fontRef idx="minor">
-            <a:schemeClr val="lt1"/>
-          </a:fontRef>
-        </p:style>
-        <p:txBody>
-          <a:bodyPr vert="vert270" rtlCol="0" anchor="ctr"/>
-          <a:p>
-            <a:pPr algn="ctr"/>
-            <a:r>
-              <a:rPr lang="en-US" altLang="zh-CN" sz="1170" dirty="0">
-                <a:solidFill>
-                  <a:schemeClr val="tx1"/>
-                </a:solidFill>
-                <a:latin typeface="Times New Roman" panose="02020603050405020304" charset="0"/>
-                <a:cs typeface="Times New Roman" panose="02020603050405020304" charset="0"/>
-              </a:rPr>
-              <a:t>UpdateMeet</a:t>
-            </a:r>
-            <a:endParaRPr lang="en-US" altLang="zh-CN" sz="1170" dirty="0">
-              <a:solidFill>
-                <a:schemeClr val="tx1"/>
-              </a:solidFill>
-              <a:latin typeface="Times New Roman" panose="02020603050405020304" charset="0"/>
-              <a:cs typeface="Times New Roman" panose="02020603050405020304" charset="0"/>
-            </a:endParaRPr>
-          </a:p>
-        </p:txBody>
-      </p:sp>
-      <p:cxnSp>
-        <p:nvCxnSpPr>
-          <p:cNvPr id="165" name="直接箭头连接符 164"/>
-          <p:cNvCxnSpPr>
-            <a:endCxn id="197" idx="0"/>
-          </p:cNvCxnSpPr>
-          <p:nvPr/>
-        </p:nvCxnSpPr>
-        <p:spPr>
-          <a:xfrm flipH="1">
-            <a:off x="12060555" y="5563235"/>
-            <a:ext cx="6350" cy="323215"/>
-          </a:xfrm>
-          <a:prstGeom prst="straightConnector1">
-            <a:avLst/>
-          </a:prstGeom>
-          <a:ln w="12700">
-            <a:solidFill>
-              <a:schemeClr val="tx1"/>
-            </a:solidFill>
-            <a:tailEnd type="triangle"/>
-          </a:ln>
-        </p:spPr>
-        <p:style>
-          <a:lnRef idx="1">
-            <a:schemeClr val="accent1"/>
-          </a:lnRef>
-          <a:fillRef idx="0">
-            <a:schemeClr val="accent1"/>
-          </a:fillRef>
-          <a:effectRef idx="0">
-            <a:schemeClr val="accent1"/>
-          </a:effectRef>
-          <a:fontRef idx="minor">
-            <a:schemeClr val="tx1"/>
-          </a:fontRef>
-        </p:style>
-      </p:cxnSp>
-      <p:sp>
-        <p:nvSpPr>
-          <p:cNvPr id="166" name="Diamond 5"/>
-          <p:cNvSpPr/>
-          <p:nvPr/>
-        </p:nvSpPr>
-        <p:spPr>
-          <a:xfrm>
-            <a:off x="12341860" y="2477770"/>
-            <a:ext cx="1329690" cy="797560"/>
-          </a:xfrm>
-          <a:prstGeom prst="diamond">
-            <a:avLst/>
-          </a:prstGeom>
-        </p:spPr>
-        <p:style>
-          <a:lnRef idx="2">
-            <a:schemeClr val="accent1">
-              <a:shade val="50000"/>
-            </a:schemeClr>
-          </a:lnRef>
-          <a:fillRef idx="1">
-            <a:schemeClr val="accent1"/>
-          </a:fillRef>
-          <a:effectRef idx="0">
-            <a:schemeClr val="accent1"/>
-          </a:effectRef>
-          <a:fontRef idx="minor">
-            <a:schemeClr val="lt1"/>
-          </a:fontRef>
-        </p:style>
-        <p:txBody>
-          <a:bodyPr rtlCol="0" anchor="ctr"/>
-          <a:p>
-            <a:pPr algn="ctr"/>
-            <a:r>
-              <a:rPr lang="en-US" altLang="zh-CN" sz="1170" dirty="0">
-                <a:solidFill>
-                  <a:sysClr val="windowText" lastClr="000000"/>
-                </a:solidFill>
-                <a:latin typeface="Times New Roman" panose="02020603050405020304" charset="0"/>
-                <a:cs typeface="Times New Roman" panose="02020603050405020304" charset="0"/>
-              </a:rPr>
-              <a:t>Iter % N == 0?</a:t>
-            </a:r>
-            <a:endParaRPr lang="en-US" altLang="zh-CN" sz="1170" dirty="0">
-              <a:solidFill>
-                <a:sysClr val="windowText" lastClr="000000"/>
-              </a:solidFill>
-              <a:latin typeface="Times New Roman" panose="02020603050405020304" charset="0"/>
-              <a:cs typeface="Times New Roman" panose="02020603050405020304" charset="0"/>
-            </a:endParaRPr>
-          </a:p>
-        </p:txBody>
-      </p:sp>
-      <p:sp>
-        <p:nvSpPr>
-          <p:cNvPr id="167" name="矩形 9"/>
-          <p:cNvSpPr/>
-          <p:nvPr/>
-        </p:nvSpPr>
-        <p:spPr>
-          <a:xfrm flipH="1">
-            <a:off x="13816330" y="3075305"/>
-            <a:ext cx="423545" cy="200025"/>
-          </a:xfrm>
-          <a:prstGeom prst="rect">
-            <a:avLst/>
-          </a:prstGeom>
-          <a:solidFill>
-            <a:srgbClr val="EDD88B"/>
-          </a:solidFill>
-          <a:ln>
-            <a:solidFill>
-              <a:schemeClr val="tx1"/>
-            </a:solidFill>
-          </a:ln>
-        </p:spPr>
-        <p:style>
-          <a:lnRef idx="2">
-            <a:schemeClr val="accent1">
-              <a:shade val="50000"/>
-            </a:schemeClr>
-          </a:lnRef>
-          <a:fillRef idx="1">
-            <a:schemeClr val="accent1"/>
-          </a:fillRef>
-          <a:effectRef idx="0">
-            <a:schemeClr val="accent1"/>
-          </a:effectRef>
-          <a:fontRef idx="minor">
-            <a:schemeClr val="lt1"/>
-          </a:fontRef>
-        </p:style>
-        <p:txBody>
-          <a:bodyPr rtlCol="0" anchor="ctr"/>
-          <a:p>
-            <a:pPr algn="ctr"/>
-            <a:r>
-              <a:rPr lang="en-US" altLang="zh-CN" sz="1400" dirty="0">
-                <a:solidFill>
-                  <a:schemeClr val="tx1"/>
-                </a:solidFill>
-                <a:latin typeface="Times New Roman" panose="02020603050405020304" charset="0"/>
-                <a:cs typeface="Times New Roman" panose="02020603050405020304" charset="0"/>
-              </a:rPr>
-              <a:t>No</a:t>
-            </a:r>
-            <a:endParaRPr lang="en-US" altLang="zh-CN" sz="1400" dirty="0">
-              <a:solidFill>
-                <a:schemeClr val="tx1"/>
-              </a:solidFill>
-              <a:latin typeface="Times New Roman" panose="02020603050405020304" charset="0"/>
-              <a:cs typeface="Times New Roman" panose="02020603050405020304" charset="0"/>
-            </a:endParaRPr>
-          </a:p>
-        </p:txBody>
-      </p:sp>
-      <p:cxnSp>
-        <p:nvCxnSpPr>
-          <p:cNvPr id="168" name="直接箭头连接符 51"/>
-          <p:cNvCxnSpPr>
-            <a:stCxn id="152" idx="2"/>
-          </p:cNvCxnSpPr>
-          <p:nvPr/>
-        </p:nvCxnSpPr>
-        <p:spPr>
-          <a:xfrm>
-            <a:off x="12059920" y="3291840"/>
-            <a:ext cx="0" cy="275590"/>
-          </a:xfrm>
-          <a:prstGeom prst="straightConnector1">
-            <a:avLst/>
-          </a:prstGeom>
-          <a:ln w="12700">
-            <a:solidFill>
-              <a:schemeClr val="tx1"/>
-            </a:solidFill>
-            <a:tailEnd type="triangle"/>
-          </a:ln>
-        </p:spPr>
-        <p:style>
-          <a:lnRef idx="1">
-            <a:schemeClr val="accent1"/>
-          </a:lnRef>
-          <a:fillRef idx="0">
-            <a:schemeClr val="accent1"/>
-          </a:fillRef>
-          <a:effectRef idx="0">
-            <a:schemeClr val="accent1"/>
-          </a:effectRef>
-          <a:fontRef idx="minor">
-            <a:schemeClr val="tx1"/>
-          </a:fontRef>
-        </p:style>
-      </p:cxnSp>
-      <p:cxnSp>
-        <p:nvCxnSpPr>
-          <p:cNvPr id="169" name="直接箭头连接符 51"/>
-          <p:cNvCxnSpPr/>
-          <p:nvPr/>
-        </p:nvCxnSpPr>
-        <p:spPr>
-          <a:xfrm>
-            <a:off x="14028420" y="3284855"/>
-            <a:ext cx="0" cy="266065"/>
-          </a:xfrm>
-          <a:prstGeom prst="straightConnector1">
-            <a:avLst/>
-          </a:prstGeom>
-          <a:ln w="12700">
-            <a:solidFill>
-              <a:schemeClr val="tx1"/>
-            </a:solidFill>
-            <a:tailEnd type="triangle"/>
-          </a:ln>
-        </p:spPr>
-        <p:style>
-          <a:lnRef idx="1">
-            <a:schemeClr val="accent1"/>
-          </a:lnRef>
-          <a:fillRef idx="0">
-            <a:schemeClr val="accent1"/>
-          </a:fillRef>
-          <a:effectRef idx="0">
-            <a:schemeClr val="accent1"/>
-          </a:effectRef>
-          <a:fontRef idx="minor">
-            <a:schemeClr val="tx1"/>
-          </a:fontRef>
-        </p:style>
-      </p:cxnSp>
-      <p:cxnSp>
-        <p:nvCxnSpPr>
-          <p:cNvPr id="170" name="连接符: 肘形 139"/>
-          <p:cNvCxnSpPr>
-            <a:stCxn id="166" idx="3"/>
-            <a:endCxn id="167" idx="0"/>
-          </p:cNvCxnSpPr>
-          <p:nvPr/>
-        </p:nvCxnSpPr>
-        <p:spPr>
-          <a:xfrm>
-            <a:off x="13671550" y="2876550"/>
-            <a:ext cx="356235" cy="198755"/>
-          </a:xfrm>
-          <a:prstGeom prst="bentConnector2">
-            <a:avLst/>
-          </a:prstGeom>
-          <a:ln w="12700">
-            <a:solidFill>
-              <a:schemeClr val="tx1"/>
-            </a:solidFill>
-            <a:tailEnd type="triangle"/>
-          </a:ln>
-        </p:spPr>
-        <p:style>
-          <a:lnRef idx="1">
-            <a:schemeClr val="accent1"/>
-          </a:lnRef>
-          <a:fillRef idx="0">
-            <a:schemeClr val="accent1"/>
-          </a:fillRef>
-          <a:effectRef idx="0">
-            <a:schemeClr val="accent1"/>
-          </a:effectRef>
-          <a:fontRef idx="minor">
-            <a:schemeClr val="tx1"/>
-          </a:fontRef>
-        </p:style>
-      </p:cxnSp>
-      <p:cxnSp>
-        <p:nvCxnSpPr>
-          <p:cNvPr id="171" name="直接箭头连接符 33"/>
-          <p:cNvCxnSpPr>
-            <a:stCxn id="164" idx="3"/>
-            <a:endCxn id="158" idx="1"/>
-          </p:cNvCxnSpPr>
-          <p:nvPr/>
-        </p:nvCxnSpPr>
-        <p:spPr>
-          <a:xfrm flipH="1">
-            <a:off x="12047855" y="3803650"/>
-            <a:ext cx="3175" cy="263525"/>
-          </a:xfrm>
-          <a:prstGeom prst="straightConnector1">
-            <a:avLst/>
-          </a:prstGeom>
-          <a:ln w="12700">
-            <a:solidFill>
-              <a:schemeClr val="tx1"/>
-            </a:solidFill>
-            <a:tailEnd type="triangle"/>
-          </a:ln>
-        </p:spPr>
-        <p:style>
-          <a:lnRef idx="1">
-            <a:schemeClr val="accent1"/>
-          </a:lnRef>
-          <a:fillRef idx="0">
-            <a:schemeClr val="accent1"/>
-          </a:fillRef>
-          <a:effectRef idx="0">
-            <a:schemeClr val="accent1"/>
-          </a:effectRef>
-          <a:fontRef idx="minor">
-            <a:schemeClr val="tx1"/>
-          </a:fontRef>
-        </p:style>
-      </p:cxnSp>
-      <p:cxnSp>
-        <p:nvCxnSpPr>
-          <p:cNvPr id="172" name="连接符: 肘形 36"/>
-          <p:cNvCxnSpPr>
-            <a:stCxn id="166" idx="1"/>
-            <a:endCxn id="152" idx="0"/>
-          </p:cNvCxnSpPr>
-          <p:nvPr/>
-        </p:nvCxnSpPr>
-        <p:spPr>
-          <a:xfrm rot="10800000" flipV="1">
-            <a:off x="12059920" y="2876550"/>
-            <a:ext cx="281940" cy="215265"/>
-          </a:xfrm>
-          <a:prstGeom prst="bentConnector2">
-            <a:avLst/>
-          </a:prstGeom>
-          <a:ln w="12700">
-            <a:solidFill>
-              <a:schemeClr val="tx1"/>
-            </a:solidFill>
-            <a:tailEnd type="triangle"/>
-          </a:ln>
-        </p:spPr>
-        <p:style>
-          <a:lnRef idx="1">
-            <a:schemeClr val="accent1"/>
-          </a:lnRef>
-          <a:fillRef idx="0">
-            <a:schemeClr val="accent1"/>
-          </a:fillRef>
-          <a:effectRef idx="0">
-            <a:schemeClr val="accent1"/>
-          </a:effectRef>
-          <a:fontRef idx="minor">
-            <a:schemeClr val="tx1"/>
-          </a:fontRef>
-        </p:style>
-      </p:cxnSp>
-      <p:cxnSp>
-        <p:nvCxnSpPr>
-          <p:cNvPr id="173" name="直接箭头连接符 33"/>
-          <p:cNvCxnSpPr>
-            <a:stCxn id="158" idx="3"/>
-            <a:endCxn id="194" idx="1"/>
-          </p:cNvCxnSpPr>
-          <p:nvPr/>
-        </p:nvCxnSpPr>
-        <p:spPr>
-          <a:xfrm>
-            <a:off x="12047855" y="4320540"/>
-            <a:ext cx="3175" cy="228600"/>
-          </a:xfrm>
-          <a:prstGeom prst="straightConnector1">
-            <a:avLst/>
-          </a:prstGeom>
-          <a:ln w="12700">
-            <a:solidFill>
-              <a:schemeClr val="tx1"/>
-            </a:solidFill>
-            <a:tailEnd type="triangle"/>
-          </a:ln>
-        </p:spPr>
-        <p:style>
-          <a:lnRef idx="1">
-            <a:schemeClr val="accent1"/>
-          </a:lnRef>
-          <a:fillRef idx="0">
-            <a:schemeClr val="accent1"/>
-          </a:fillRef>
-          <a:effectRef idx="0">
-            <a:schemeClr val="accent1"/>
-          </a:effectRef>
-          <a:fontRef idx="minor">
-            <a:schemeClr val="tx1"/>
-          </a:fontRef>
-        </p:style>
-      </p:cxnSp>
-      <p:cxnSp>
-        <p:nvCxnSpPr>
-          <p:cNvPr id="177" name="直接箭头连接符 33"/>
-          <p:cNvCxnSpPr>
-            <a:stCxn id="194" idx="3"/>
-            <a:endCxn id="193" idx="1"/>
-          </p:cNvCxnSpPr>
-          <p:nvPr/>
-        </p:nvCxnSpPr>
-        <p:spPr>
-          <a:xfrm>
-            <a:off x="12051030" y="4872990"/>
-            <a:ext cx="8890" cy="297180"/>
-          </a:xfrm>
-          <a:prstGeom prst="straightConnector1">
-            <a:avLst/>
-          </a:prstGeom>
-          <a:ln w="12700">
-            <a:solidFill>
-              <a:schemeClr val="tx1"/>
-            </a:solidFill>
-            <a:tailEnd type="triangle"/>
-          </a:ln>
-        </p:spPr>
-        <p:style>
-          <a:lnRef idx="1">
-            <a:schemeClr val="accent1"/>
-          </a:lnRef>
-          <a:fillRef idx="0">
-            <a:schemeClr val="accent1"/>
-          </a:fillRef>
-          <a:effectRef idx="0">
-            <a:schemeClr val="accent1"/>
-          </a:effectRef>
-          <a:fontRef idx="minor">
-            <a:schemeClr val="tx1"/>
-          </a:fontRef>
-        </p:style>
-      </p:cxnSp>
-      <p:sp>
-        <p:nvSpPr>
-          <p:cNvPr id="193" name="矩形: 圆角 29"/>
-          <p:cNvSpPr/>
-          <p:nvPr/>
-        </p:nvSpPr>
-        <p:spPr>
-          <a:xfrm rot="5400000">
-            <a:off x="11856085" y="4825365"/>
-            <a:ext cx="407670" cy="1097280"/>
-          </a:xfrm>
-          <a:prstGeom prst="roundRect">
-            <a:avLst/>
-          </a:prstGeom>
-          <a:solidFill>
-            <a:srgbClr val="D0CECE"/>
-          </a:solidFill>
-          <a:ln>
-            <a:solidFill>
-              <a:schemeClr val="tx1"/>
-            </a:solidFill>
-          </a:ln>
-        </p:spPr>
-        <p:style>
-          <a:lnRef idx="2">
-            <a:schemeClr val="accent1">
-              <a:shade val="50000"/>
-            </a:schemeClr>
-          </a:lnRef>
-          <a:fillRef idx="1">
-            <a:schemeClr val="accent1"/>
-          </a:fillRef>
-          <a:effectRef idx="0">
-            <a:schemeClr val="accent1"/>
-          </a:effectRef>
-          <a:fontRef idx="minor">
-            <a:schemeClr val="lt1"/>
-          </a:fontRef>
-        </p:style>
-        <p:txBody>
-          <a:bodyPr vert="vert270" rtlCol="0" anchor="ctr"/>
-          <a:p>
-            <a:pPr algn="ctr"/>
-            <a:r>
-              <a:rPr lang="en-US" altLang="zh-CN" sz="1170" dirty="0">
-                <a:solidFill>
-                  <a:schemeClr val="tx1"/>
-                </a:solidFill>
-                <a:latin typeface="Times New Roman" panose="02020603050405020304" charset="0"/>
-                <a:cs typeface="Times New Roman" panose="02020603050405020304" charset="0"/>
-              </a:rPr>
-              <a:t>ValidateSample</a:t>
-            </a:r>
-            <a:endParaRPr lang="en-US" altLang="zh-CN" sz="1170" dirty="0">
-              <a:solidFill>
-                <a:schemeClr val="tx1"/>
-              </a:solidFill>
-              <a:latin typeface="Times New Roman" panose="02020603050405020304" charset="0"/>
-              <a:cs typeface="Times New Roman" panose="02020603050405020304" charset="0"/>
-            </a:endParaRPr>
-          </a:p>
-        </p:txBody>
-      </p:sp>
-      <p:sp>
-        <p:nvSpPr>
-          <p:cNvPr id="194" name="矩形: 圆角 29"/>
-          <p:cNvSpPr/>
-          <p:nvPr/>
-        </p:nvSpPr>
-        <p:spPr>
-          <a:xfrm rot="5400000">
-            <a:off x="11889105" y="4285615"/>
-            <a:ext cx="323850" cy="850900"/>
-          </a:xfrm>
-          <a:prstGeom prst="roundRect">
-            <a:avLst/>
-          </a:prstGeom>
-          <a:solidFill>
-            <a:schemeClr val="accent6">
-              <a:lumMod val="60000"/>
-              <a:lumOff val="40000"/>
-            </a:schemeClr>
-          </a:solidFill>
-          <a:ln>
-            <a:solidFill>
-              <a:schemeClr val="tx1"/>
-            </a:solidFill>
-          </a:ln>
-        </p:spPr>
-        <p:style>
-          <a:lnRef idx="2">
-            <a:schemeClr val="accent1">
-              <a:shade val="50000"/>
-            </a:schemeClr>
-          </a:lnRef>
-          <a:fillRef idx="1">
-            <a:schemeClr val="accent1"/>
-          </a:fillRef>
-          <a:effectRef idx="0">
-            <a:schemeClr val="accent1"/>
-          </a:effectRef>
-          <a:fontRef idx="minor">
-            <a:schemeClr val="lt1"/>
-          </a:fontRef>
-        </p:style>
-        <p:txBody>
-          <a:bodyPr vert="vert270" rtlCol="0" anchor="ctr"/>
-          <a:p>
-            <a:pPr algn="ctr"/>
-            <a:r>
-              <a:rPr lang="en-US" altLang="zh-CN" sz="1170" dirty="0">
-                <a:solidFill>
-                  <a:schemeClr val="tx1"/>
-                </a:solidFill>
-                <a:latin typeface="Times New Roman" panose="02020603050405020304" charset="0"/>
-                <a:cs typeface="Times New Roman" panose="02020603050405020304" charset="0"/>
-                <a:sym typeface="+mn-ea"/>
-              </a:rPr>
-              <a:t>Update SSR</a:t>
-            </a:r>
-            <a:endParaRPr lang="en-US" altLang="zh-CN" sz="1170" dirty="0">
-              <a:solidFill>
-                <a:schemeClr val="tx1"/>
-              </a:solidFill>
-              <a:latin typeface="Times New Roman" panose="02020603050405020304" charset="0"/>
-              <a:cs typeface="Times New Roman" panose="02020603050405020304" charset="0"/>
-              <a:sym typeface="+mn-ea"/>
-            </a:endParaRPr>
-          </a:p>
-        </p:txBody>
-      </p:sp>
-      <p:sp>
-        <p:nvSpPr>
-          <p:cNvPr id="196" name="矩形: 圆角 29"/>
-          <p:cNvSpPr/>
-          <p:nvPr/>
-        </p:nvSpPr>
-        <p:spPr>
-          <a:xfrm rot="5400000">
-            <a:off x="13851255" y="3219450"/>
-            <a:ext cx="354965" cy="1019175"/>
-          </a:xfrm>
-          <a:prstGeom prst="roundRect">
-            <a:avLst/>
-          </a:prstGeom>
-          <a:solidFill>
-            <a:srgbClr val="D0CECE"/>
-          </a:solidFill>
-          <a:ln>
-            <a:solidFill>
-              <a:schemeClr val="tx1"/>
-            </a:solidFill>
-          </a:ln>
-        </p:spPr>
-        <p:style>
-          <a:lnRef idx="2">
-            <a:schemeClr val="accent1">
-              <a:shade val="50000"/>
-            </a:schemeClr>
-          </a:lnRef>
-          <a:fillRef idx="1">
-            <a:schemeClr val="accent1"/>
-          </a:fillRef>
-          <a:effectRef idx="0">
-            <a:schemeClr val="accent1"/>
-          </a:effectRef>
-          <a:fontRef idx="minor">
-            <a:schemeClr val="lt1"/>
-          </a:fontRef>
-        </p:style>
-        <p:txBody>
-          <a:bodyPr vert="vert270" rtlCol="0" anchor="ctr"/>
-          <a:p>
-            <a:pPr algn="ctr"/>
-            <a:r>
-              <a:rPr lang="en-US" altLang="zh-CN" sz="1400" dirty="0">
-                <a:solidFill>
-                  <a:sysClr val="windowText" lastClr="000000"/>
-                </a:solidFill>
-                <a:latin typeface="Times New Roman" panose="02020603050405020304" charset="0"/>
-                <a:cs typeface="Times New Roman" panose="02020603050405020304" charset="0"/>
-              </a:rPr>
-              <a:t>return false</a:t>
-            </a:r>
-            <a:endParaRPr lang="en-US" altLang="zh-CN" sz="1400" dirty="0">
-              <a:solidFill>
-                <a:sysClr val="windowText" lastClr="000000"/>
-              </a:solidFill>
-              <a:latin typeface="Times New Roman" panose="02020603050405020304" charset="0"/>
-              <a:cs typeface="Times New Roman" panose="02020603050405020304" charset="0"/>
-            </a:endParaRPr>
-          </a:p>
-        </p:txBody>
-      </p:sp>
-      <p:sp>
-        <p:nvSpPr>
-          <p:cNvPr id="197" name="Diamond 120"/>
-          <p:cNvSpPr/>
-          <p:nvPr/>
-        </p:nvSpPr>
-        <p:spPr>
-          <a:xfrm>
-            <a:off x="11195685" y="5886450"/>
-            <a:ext cx="1729740" cy="650240"/>
-          </a:xfrm>
-          <a:prstGeom prst="diamond">
-            <a:avLst/>
-          </a:prstGeom>
-        </p:spPr>
-        <p:style>
-          <a:lnRef idx="2">
-            <a:schemeClr val="accent1">
-              <a:shade val="50000"/>
-            </a:schemeClr>
-          </a:lnRef>
-          <a:fillRef idx="1">
-            <a:schemeClr val="accent1"/>
-          </a:fillRef>
-          <a:effectRef idx="0">
-            <a:schemeClr val="accent1"/>
-          </a:effectRef>
-          <a:fontRef idx="minor">
-            <a:schemeClr val="lt1"/>
-          </a:fontRef>
-        </p:style>
-        <p:txBody>
-          <a:bodyPr rtlCol="0" anchor="ctr"/>
-          <a:p>
-            <a:pPr algn="ctr">
-              <a:buClrTx/>
-              <a:buSzTx/>
-              <a:buFontTx/>
-            </a:pPr>
-            <a:r>
-              <a:rPr lang="en-US" altLang="zh-CN" sz="1400" dirty="0">
-                <a:solidFill>
-                  <a:schemeClr val="tx1"/>
-                </a:solidFill>
-                <a:latin typeface="Times New Roman" panose="02020603050405020304" charset="0"/>
-                <a:cs typeface="Times New Roman" panose="02020603050405020304" charset="0"/>
-              </a:rPr>
-              <a:t>Collision?</a:t>
-            </a:r>
-            <a:endParaRPr lang="en-US" altLang="zh-CN" sz="1400" dirty="0">
-              <a:solidFill>
-                <a:schemeClr val="tx1"/>
-              </a:solidFill>
-              <a:latin typeface="Times New Roman" panose="02020603050405020304" charset="0"/>
-              <a:cs typeface="Times New Roman" panose="02020603050405020304" charset="0"/>
-            </a:endParaRPr>
-          </a:p>
-        </p:txBody>
-      </p:sp>
-      <p:sp>
-        <p:nvSpPr>
-          <p:cNvPr id="199" name="Diamond 120"/>
-          <p:cNvSpPr/>
-          <p:nvPr/>
-        </p:nvSpPr>
-        <p:spPr>
-          <a:xfrm>
-            <a:off x="13103860" y="4773295"/>
-            <a:ext cx="1849120" cy="650240"/>
-          </a:xfrm>
-          <a:prstGeom prst="diamond">
-            <a:avLst/>
-          </a:prstGeom>
-        </p:spPr>
-        <p:style>
-          <a:lnRef idx="2">
-            <a:schemeClr val="accent1">
-              <a:shade val="50000"/>
-            </a:schemeClr>
-          </a:lnRef>
-          <a:fillRef idx="1">
-            <a:schemeClr val="accent1"/>
-          </a:fillRef>
-          <a:effectRef idx="0">
-            <a:schemeClr val="accent1"/>
-          </a:effectRef>
-          <a:fontRef idx="minor">
-            <a:schemeClr val="lt1"/>
-          </a:fontRef>
-        </p:style>
-        <p:txBody>
-          <a:bodyPr rtlCol="0" anchor="ctr"/>
-          <a:p>
-            <a:pPr algn="ctr">
-              <a:buClrTx/>
-              <a:buSzTx/>
-              <a:buFontTx/>
-            </a:pPr>
-            <a:r>
-              <a:rPr lang="en-US" altLang="zh-CN" sz="1170" dirty="0">
-                <a:solidFill>
-                  <a:schemeClr val="tx1"/>
-                </a:solidFill>
-                <a:latin typeface="Times New Roman" panose="02020603050405020304" charset="0"/>
-                <a:cs typeface="Times New Roman" panose="02020603050405020304" charset="0"/>
-              </a:rPr>
-              <a:t>Check</a:t>
-            </a:r>
-            <a:endParaRPr lang="en-US" altLang="zh-CN" sz="1170" dirty="0">
-              <a:solidFill>
-                <a:schemeClr val="tx1"/>
-              </a:solidFill>
-              <a:latin typeface="Times New Roman" panose="02020603050405020304" charset="0"/>
-              <a:cs typeface="Times New Roman" panose="02020603050405020304" charset="0"/>
-            </a:endParaRPr>
-          </a:p>
-          <a:p>
-            <a:pPr algn="ctr">
-              <a:buClrTx/>
-              <a:buSzTx/>
-              <a:buFontTx/>
-            </a:pPr>
-            <a:r>
-              <a:rPr lang="en-US" altLang="zh-CN" sz="1170" dirty="0">
-                <a:solidFill>
-                  <a:schemeClr val="tx1"/>
-                </a:solidFill>
-                <a:latin typeface="Times New Roman" panose="02020603050405020304" charset="0"/>
-                <a:cs typeface="Times New Roman" panose="02020603050405020304" charset="0"/>
-              </a:rPr>
-              <a:t>   Connect？</a:t>
-            </a:r>
-            <a:endParaRPr lang="en-US" altLang="zh-CN" sz="1170" dirty="0">
-              <a:solidFill>
-                <a:schemeClr val="tx1"/>
-              </a:solidFill>
-              <a:latin typeface="Times New Roman" panose="02020603050405020304" charset="0"/>
-              <a:cs typeface="Times New Roman" panose="02020603050405020304" charset="0"/>
-            </a:endParaRPr>
-          </a:p>
-        </p:txBody>
-      </p:sp>
-      <p:cxnSp>
-        <p:nvCxnSpPr>
-          <p:cNvPr id="200" name="直接箭头连接符 199"/>
-          <p:cNvCxnSpPr>
-            <a:stCxn id="197" idx="3"/>
-          </p:cNvCxnSpPr>
-          <p:nvPr/>
-        </p:nvCxnSpPr>
-        <p:spPr>
-          <a:xfrm flipV="1">
-            <a:off x="12925425" y="4307840"/>
-            <a:ext cx="12065" cy="1903730"/>
-          </a:xfrm>
-          <a:prstGeom prst="straightConnector1">
-            <a:avLst/>
-          </a:prstGeom>
-          <a:ln w="12700">
-            <a:solidFill>
-              <a:schemeClr val="tx1"/>
-            </a:solidFill>
-            <a:tailEnd type="triangle"/>
-          </a:ln>
-        </p:spPr>
-        <p:style>
-          <a:lnRef idx="1">
-            <a:schemeClr val="accent1"/>
-          </a:lnRef>
-          <a:fillRef idx="0">
-            <a:schemeClr val="accent1"/>
-          </a:fillRef>
-          <a:effectRef idx="0">
-            <a:schemeClr val="accent1"/>
-          </a:effectRef>
-          <a:fontRef idx="minor">
-            <a:schemeClr val="tx1"/>
-          </a:fontRef>
-        </p:style>
-      </p:cxnSp>
-      <p:sp>
-        <p:nvSpPr>
-          <p:cNvPr id="201" name="文本框 200"/>
-          <p:cNvSpPr txBox="1"/>
-          <p:nvPr/>
-        </p:nvSpPr>
-        <p:spPr>
-          <a:xfrm>
-            <a:off x="14028420" y="5498465"/>
-            <a:ext cx="564515" cy="306705"/>
-          </a:xfrm>
-          <a:prstGeom prst="rect">
-            <a:avLst/>
-          </a:prstGeom>
-          <a:noFill/>
-        </p:spPr>
-        <p:txBody>
-          <a:bodyPr wrap="square" rtlCol="0">
-            <a:spAutoFit/>
-          </a:bodyPr>
-          <a:p>
-            <a:pPr algn="l">
-              <a:buClrTx/>
-              <a:buSzTx/>
-              <a:buFontTx/>
-            </a:pPr>
-            <a:r>
-              <a:rPr lang="en-US" altLang="zh-CN" sz="1400" dirty="0" err="1">
-                <a:latin typeface="Times New Roman" panose="02020603050405020304" charset="0"/>
-                <a:cs typeface="Times New Roman" panose="02020603050405020304" charset="0"/>
-              </a:rPr>
-              <a:t>Yes</a:t>
-            </a:r>
-            <a:endParaRPr lang="en-US" altLang="zh-CN" sz="1400" dirty="0" err="1">
-              <a:latin typeface="Times New Roman" panose="02020603050405020304" charset="0"/>
-              <a:cs typeface="Times New Roman" panose="02020603050405020304" charset="0"/>
-            </a:endParaRPr>
-          </a:p>
-        </p:txBody>
-      </p:sp>
-      <p:cxnSp>
-        <p:nvCxnSpPr>
-          <p:cNvPr id="203" name="连接符: 肘形 36"/>
-          <p:cNvCxnSpPr>
-            <a:stCxn id="197" idx="1"/>
-            <a:endCxn id="166" idx="0"/>
-          </p:cNvCxnSpPr>
-          <p:nvPr/>
-        </p:nvCxnSpPr>
-        <p:spPr>
-          <a:xfrm rot="10800000" flipH="1">
-            <a:off x="11195685" y="2477770"/>
-            <a:ext cx="1811020" cy="3733800"/>
-          </a:xfrm>
-          <a:prstGeom prst="bentConnector4">
-            <a:avLst>
-              <a:gd name="adj1" fmla="val -13149"/>
-              <a:gd name="adj2" fmla="val 106378"/>
-            </a:avLst>
-          </a:prstGeom>
-          <a:ln w="12700">
-            <a:solidFill>
-              <a:schemeClr val="tx1"/>
-            </a:solidFill>
-            <a:tailEnd type="triangle"/>
-          </a:ln>
-        </p:spPr>
-        <p:style>
-          <a:lnRef idx="1">
-            <a:schemeClr val="accent1"/>
-          </a:lnRef>
-          <a:fillRef idx="0">
-            <a:schemeClr val="accent1"/>
-          </a:fillRef>
-          <a:effectRef idx="0">
-            <a:schemeClr val="accent1"/>
-          </a:effectRef>
-          <a:fontRef idx="minor">
-            <a:schemeClr val="tx1"/>
-          </a:fontRef>
-        </p:style>
-      </p:cxnSp>
-      <p:cxnSp>
-        <p:nvCxnSpPr>
-          <p:cNvPr id="205" name="连接符: 肘形 36"/>
-          <p:cNvCxnSpPr>
-            <a:endCxn id="199" idx="0"/>
-          </p:cNvCxnSpPr>
-          <p:nvPr/>
-        </p:nvCxnSpPr>
-        <p:spPr>
-          <a:xfrm>
-            <a:off x="12936855" y="4316095"/>
-            <a:ext cx="1091565" cy="457200"/>
-          </a:xfrm>
-          <a:prstGeom prst="bentConnector2">
-            <a:avLst/>
-          </a:prstGeom>
-          <a:ln w="12700">
-            <a:solidFill>
-              <a:schemeClr val="tx1"/>
-            </a:solidFill>
-            <a:tailEnd type="triangle"/>
-          </a:ln>
-        </p:spPr>
-        <p:style>
-          <a:lnRef idx="1">
-            <a:schemeClr val="accent1"/>
-          </a:lnRef>
-          <a:fillRef idx="0">
-            <a:schemeClr val="accent1"/>
-          </a:fillRef>
-          <a:effectRef idx="0">
-            <a:schemeClr val="accent1"/>
-          </a:effectRef>
-          <a:fontRef idx="minor">
-            <a:schemeClr val="tx1"/>
-          </a:fontRef>
-        </p:style>
-      </p:cxnSp>
-      <p:cxnSp>
-        <p:nvCxnSpPr>
-          <p:cNvPr id="206" name="直接箭头连接符 205"/>
-          <p:cNvCxnSpPr>
-            <a:stCxn id="199" idx="2"/>
-            <a:endCxn id="162" idx="1"/>
-          </p:cNvCxnSpPr>
-          <p:nvPr/>
-        </p:nvCxnSpPr>
-        <p:spPr>
-          <a:xfrm flipH="1">
-            <a:off x="14027785" y="5423535"/>
-            <a:ext cx="635" cy="340360"/>
-          </a:xfrm>
-          <a:prstGeom prst="straightConnector1">
-            <a:avLst/>
-          </a:prstGeom>
-          <a:ln w="12700">
-            <a:solidFill>
-              <a:schemeClr val="tx1"/>
-            </a:solidFill>
-            <a:tailEnd type="triangle"/>
-          </a:ln>
-        </p:spPr>
-        <p:style>
-          <a:lnRef idx="1">
-            <a:schemeClr val="accent1"/>
-          </a:lnRef>
-          <a:fillRef idx="0">
-            <a:schemeClr val="accent1"/>
-          </a:fillRef>
-          <a:effectRef idx="0">
-            <a:schemeClr val="accent1"/>
-          </a:effectRef>
-          <a:fontRef idx="minor">
-            <a:schemeClr val="tx1"/>
-          </a:fontRef>
-        </p:style>
-      </p:cxnSp>
-      <p:cxnSp>
-        <p:nvCxnSpPr>
-          <p:cNvPr id="208" name="连接符: 肘形 139"/>
-          <p:cNvCxnSpPr>
-            <a:stCxn id="199" idx="3"/>
-            <a:endCxn id="166" idx="0"/>
-          </p:cNvCxnSpPr>
-          <p:nvPr/>
-        </p:nvCxnSpPr>
-        <p:spPr>
-          <a:xfrm flipH="1" flipV="1">
-            <a:off x="13006705" y="2477770"/>
-            <a:ext cx="1946275" cy="2620645"/>
-          </a:xfrm>
-          <a:prstGeom prst="bentConnector4">
-            <a:avLst>
-              <a:gd name="adj1" fmla="val -12235"/>
-              <a:gd name="adj2" fmla="val 109087"/>
-            </a:avLst>
-          </a:prstGeom>
-          <a:ln w="12700">
-            <a:solidFill>
-              <a:schemeClr val="tx1"/>
-            </a:solidFill>
-            <a:tailEnd type="triangle"/>
-          </a:ln>
-        </p:spPr>
-        <p:style>
-          <a:lnRef idx="1">
-            <a:schemeClr val="accent1"/>
-          </a:lnRef>
-          <a:fillRef idx="0">
-            <a:schemeClr val="accent1"/>
-          </a:fillRef>
-          <a:effectRef idx="0">
-            <a:schemeClr val="accent1"/>
-          </a:effectRef>
-          <a:fontRef idx="minor">
-            <a:schemeClr val="tx1"/>
-          </a:fontRef>
-        </p:style>
-      </p:cxnSp>
-      <p:sp>
-        <p:nvSpPr>
-          <p:cNvPr id="209" name="文本框 208"/>
-          <p:cNvSpPr txBox="1"/>
-          <p:nvPr/>
-        </p:nvSpPr>
-        <p:spPr>
-          <a:xfrm>
-            <a:off x="11006455" y="5886450"/>
-            <a:ext cx="564515" cy="306705"/>
-          </a:xfrm>
-          <a:prstGeom prst="rect">
-            <a:avLst/>
-          </a:prstGeom>
-          <a:noFill/>
-        </p:spPr>
-        <p:txBody>
-          <a:bodyPr wrap="square" rtlCol="0">
-            <a:spAutoFit/>
-          </a:bodyPr>
-          <a:p>
-            <a:r>
-              <a:rPr lang="en-US" altLang="zh-CN" sz="1400" dirty="0" err="1">
-                <a:latin typeface="Times New Roman" panose="02020603050405020304" charset="0"/>
-                <a:cs typeface="Times New Roman" panose="02020603050405020304" charset="0"/>
-              </a:rPr>
-              <a:t>No</a:t>
-            </a:r>
-            <a:endParaRPr lang="en-US" altLang="zh-CN" sz="1400" dirty="0" err="1">
-              <a:latin typeface="Times New Roman" panose="02020603050405020304" charset="0"/>
-              <a:cs typeface="Times New Roman" panose="02020603050405020304" charset="0"/>
-            </a:endParaRPr>
-          </a:p>
-        </p:txBody>
-      </p:sp>
-      <p:sp>
-        <p:nvSpPr>
-          <p:cNvPr id="210" name="文本框 209"/>
-          <p:cNvSpPr txBox="1"/>
-          <p:nvPr/>
-        </p:nvSpPr>
-        <p:spPr>
-          <a:xfrm>
-            <a:off x="12476480" y="5763895"/>
-            <a:ext cx="564515" cy="306705"/>
-          </a:xfrm>
-          <a:prstGeom prst="rect">
-            <a:avLst/>
-          </a:prstGeom>
-          <a:noFill/>
-        </p:spPr>
-        <p:txBody>
-          <a:bodyPr wrap="square" rtlCol="0">
-            <a:spAutoFit/>
-          </a:bodyPr>
-          <a:p>
-            <a:pPr algn="l">
-              <a:buClrTx/>
-              <a:buSzTx/>
-              <a:buFontTx/>
-            </a:pPr>
-            <a:r>
-              <a:rPr lang="en-US" altLang="zh-CN" sz="1400" dirty="0" err="1">
-                <a:latin typeface="Times New Roman" panose="02020603050405020304" charset="0"/>
-                <a:cs typeface="Times New Roman" panose="02020603050405020304" charset="0"/>
-              </a:rPr>
-              <a:t>Yes</a:t>
-            </a:r>
-            <a:endParaRPr lang="en-US" altLang="zh-CN" sz="1400" dirty="0" err="1">
-              <a:latin typeface="Times New Roman" panose="02020603050405020304" charset="0"/>
-              <a:cs typeface="Times New Roman" panose="02020603050405020304" charset="0"/>
-            </a:endParaRPr>
-          </a:p>
-        </p:txBody>
-      </p:sp>
-      <p:sp>
-        <p:nvSpPr>
-          <p:cNvPr id="212" name="文本框 211"/>
-          <p:cNvSpPr txBox="1"/>
-          <p:nvPr/>
-        </p:nvSpPr>
-        <p:spPr>
-          <a:xfrm>
-            <a:off x="14791690" y="4749165"/>
-            <a:ext cx="564515" cy="306705"/>
-          </a:xfrm>
-          <a:prstGeom prst="rect">
-            <a:avLst/>
-          </a:prstGeom>
-          <a:noFill/>
-        </p:spPr>
-        <p:txBody>
-          <a:bodyPr wrap="square" rtlCol="0">
-            <a:spAutoFit/>
-          </a:bodyPr>
-          <a:p>
-            <a:r>
-              <a:rPr lang="en-US" altLang="zh-CN" sz="1400" dirty="0" err="1">
-                <a:latin typeface="Times New Roman" panose="02020603050405020304" charset="0"/>
-                <a:cs typeface="Times New Roman" panose="02020603050405020304" charset="0"/>
-              </a:rPr>
-              <a:t>No</a:t>
-            </a:r>
-            <a:endParaRPr lang="en-US" altLang="zh-CN" sz="1400" dirty="0" err="1">
-              <a:latin typeface="Times New Roman" panose="02020603050405020304" charset="0"/>
-              <a:cs typeface="Times New Roman" panose="02020603050405020304" charset="0"/>
-            </a:endParaRPr>
-          </a:p>
-        </p:txBody>
-      </p:sp>
-      <p:sp>
-        <p:nvSpPr>
-          <p:cNvPr id="74" name="矩形: 圆角 29"/>
-          <p:cNvSpPr/>
-          <p:nvPr/>
-        </p:nvSpPr>
-        <p:spPr>
-          <a:xfrm rot="5400000">
-            <a:off x="12637135" y="556895"/>
-            <a:ext cx="615950" cy="1206500"/>
-          </a:xfrm>
-          <a:prstGeom prst="roundRect">
-            <a:avLst/>
-          </a:prstGeom>
-          <a:solidFill>
-            <a:srgbClr val="D0CECE"/>
-          </a:solidFill>
-          <a:ln>
-            <a:solidFill>
-              <a:schemeClr val="tx1"/>
-            </a:solidFill>
-          </a:ln>
-        </p:spPr>
-        <p:style>
-          <a:lnRef idx="2">
-            <a:schemeClr val="accent1">
-              <a:shade val="50000"/>
-            </a:schemeClr>
-          </a:lnRef>
-          <a:fillRef idx="1">
-            <a:schemeClr val="accent1"/>
-          </a:fillRef>
-          <a:effectRef idx="0">
-            <a:schemeClr val="accent1"/>
-          </a:effectRef>
-          <a:fontRef idx="minor">
-            <a:schemeClr val="lt1"/>
-          </a:fontRef>
-        </p:style>
-        <p:txBody>
-          <a:bodyPr vert="vert270" rtlCol="0" anchor="ctr"/>
-          <a:p>
-            <a:pPr algn="ctr"/>
-            <a:r>
-              <a:rPr lang="zh-CN" altLang="en-US" sz="1400" dirty="0">
-                <a:solidFill>
-                  <a:sysClr val="windowText" lastClr="000000"/>
-                </a:solidFill>
-                <a:latin typeface="Times New Roman" panose="02020603050405020304" charset="0"/>
-                <a:cs typeface="Times New Roman" panose="02020603050405020304" charset="0"/>
-              </a:rPr>
-              <a:t>输入</a:t>
-            </a:r>
-            <a:r>
-              <a:rPr lang="en-US" altLang="zh-CN" sz="1400" dirty="0">
-                <a:solidFill>
-                  <a:sysClr val="windowText" lastClr="000000"/>
-                </a:solidFill>
-                <a:latin typeface="Times New Roman" panose="02020603050405020304" charset="0"/>
-                <a:cs typeface="Times New Roman" panose="02020603050405020304" charset="0"/>
-              </a:rPr>
-              <a:t>RGB</a:t>
-            </a:r>
-            <a:r>
-              <a:rPr lang="zh-CN" altLang="en-US" sz="1400" dirty="0">
-                <a:solidFill>
-                  <a:sysClr val="windowText" lastClr="000000"/>
-                </a:solidFill>
-                <a:latin typeface="Times New Roman" panose="02020603050405020304" charset="0"/>
-                <a:cs typeface="Times New Roman" panose="02020603050405020304" charset="0"/>
-              </a:rPr>
-              <a:t>图</a:t>
-            </a:r>
-            <a:r>
-              <a:rPr lang="en-US" altLang="zh-CN" sz="1400" dirty="0">
-                <a:solidFill>
-                  <a:sysClr val="windowText" lastClr="000000"/>
-                </a:solidFill>
-                <a:latin typeface="Times New Roman" panose="02020603050405020304" charset="0"/>
-                <a:cs typeface="Times New Roman" panose="02020603050405020304" charset="0"/>
-              </a:rPr>
-              <a:t>+</a:t>
-            </a:r>
-            <a:r>
-              <a:rPr lang="zh-CN" altLang="en-US" sz="1400" dirty="0">
-                <a:solidFill>
-                  <a:sysClr val="windowText" lastClr="000000"/>
-                </a:solidFill>
-                <a:latin typeface="Times New Roman" panose="02020603050405020304" charset="0"/>
-                <a:cs typeface="Times New Roman" panose="02020603050405020304" charset="0"/>
-              </a:rPr>
-              <a:t>部位</a:t>
-            </a:r>
-            <a:r>
-              <a:rPr lang="zh-CN" altLang="en-US" sz="1400" dirty="0">
-                <a:solidFill>
-                  <a:sysClr val="windowText" lastClr="000000"/>
-                </a:solidFill>
-                <a:latin typeface="Times New Roman" panose="02020603050405020304" charset="0"/>
-                <a:cs typeface="Times New Roman" panose="02020603050405020304" charset="0"/>
-              </a:rPr>
-              <a:t>码</a:t>
-            </a:r>
-            <a:endParaRPr lang="zh-CN" altLang="en-US" sz="1400" dirty="0">
-              <a:solidFill>
-                <a:sysClr val="windowText" lastClr="000000"/>
-              </a:solidFill>
-              <a:latin typeface="Times New Roman" panose="02020603050405020304" charset="0"/>
-              <a:cs typeface="Times New Roman" panose="02020603050405020304" charset="0"/>
-            </a:endParaRPr>
-          </a:p>
-        </p:txBody>
-      </p:sp>
-      <p:sp>
-        <p:nvSpPr>
-          <p:cNvPr id="75" name="矩形: 圆角 30"/>
-          <p:cNvSpPr/>
-          <p:nvPr/>
-        </p:nvSpPr>
-        <p:spPr>
-          <a:xfrm rot="5400000">
-            <a:off x="12836525" y="1325245"/>
-            <a:ext cx="253365" cy="973455"/>
-          </a:xfrm>
-          <a:prstGeom prst="roundRect">
-            <a:avLst/>
-          </a:prstGeom>
-          <a:solidFill>
-            <a:schemeClr val="accent4">
-              <a:lumMod val="60000"/>
-              <a:lumOff val="40000"/>
-            </a:schemeClr>
-          </a:solidFill>
-          <a:ln>
-            <a:solidFill>
-              <a:schemeClr val="tx1"/>
-            </a:solidFill>
-          </a:ln>
-        </p:spPr>
-        <p:style>
-          <a:lnRef idx="2">
-            <a:schemeClr val="accent4">
-              <a:shade val="50000"/>
-            </a:schemeClr>
-          </a:lnRef>
-          <a:fillRef idx="1">
-            <a:schemeClr val="accent4"/>
-          </a:fillRef>
-          <a:effectRef idx="0">
-            <a:schemeClr val="accent4"/>
-          </a:effectRef>
-          <a:fontRef idx="minor">
-            <a:schemeClr val="lt1"/>
-          </a:fontRef>
-        </p:style>
-        <p:txBody>
-          <a:bodyPr vert="vert270" rtlCol="0" anchor="ctr"/>
-          <a:p>
-            <a:pPr algn="ctr">
-              <a:buClrTx/>
-              <a:buSzTx/>
-              <a:buFontTx/>
-            </a:pPr>
-            <a:r>
-              <a:rPr lang="en-US" altLang="zh-CN" sz="1170" dirty="0">
-                <a:solidFill>
-                  <a:schemeClr val="tx1"/>
-                </a:solidFill>
-                <a:latin typeface="Times New Roman" panose="02020603050405020304" charset="0"/>
-                <a:cs typeface="Times New Roman" panose="02020603050405020304" charset="0"/>
-              </a:rPr>
-              <a:t>C</a:t>
-            </a:r>
-            <a:r>
-              <a:rPr lang="en-US" altLang="zh-CN" sz="1170" dirty="0">
-                <a:solidFill>
-                  <a:schemeClr val="tx1"/>
-                </a:solidFill>
-                <a:latin typeface="Times New Roman" panose="02020603050405020304" charset="0"/>
-                <a:cs typeface="Times New Roman" panose="02020603050405020304" charset="0"/>
-              </a:rPr>
-              <a:t>onnect</a:t>
-            </a:r>
-            <a:endParaRPr lang="en-US" altLang="zh-CN" sz="1170" dirty="0">
-              <a:solidFill>
-                <a:schemeClr val="tx1"/>
-              </a:solidFill>
-              <a:latin typeface="Times New Roman" panose="02020603050405020304" charset="0"/>
-              <a:cs typeface="Times New Roman" panose="02020603050405020304" charset="0"/>
-            </a:endParaRPr>
+            <a:endParaRPr lang="zh-CN" altLang="en-US"/>
           </a:p>
         </p:txBody>
       </p:sp>
@@ -16122,8 +15184,8 @@
         </p:nvSpPr>
         <p:spPr>
           <a:xfrm>
-            <a:off x="3770630" y="395605"/>
-            <a:ext cx="4853940" cy="6304280"/>
+            <a:off x="4247515" y="172085"/>
+            <a:ext cx="4853940" cy="6591300"/>
           </a:xfrm>
           <a:prstGeom prst="roundRect">
             <a:avLst>
@@ -16174,7 +15236,7 @@
         </p:nvSpPr>
         <p:spPr>
           <a:xfrm rot="5400000">
-            <a:off x="5409565" y="-61595"/>
+            <a:off x="5886450" y="-144780"/>
             <a:ext cx="528320" cy="1841500"/>
           </a:xfrm>
           <a:prstGeom prst="roundRect">
@@ -16287,7 +15349,7 @@
         </p:nvSpPr>
         <p:spPr>
           <a:xfrm rot="5400000">
-            <a:off x="5436870" y="1151255"/>
+            <a:off x="5913755" y="1068070"/>
             <a:ext cx="462915" cy="1177925"/>
           </a:xfrm>
           <a:prstGeom prst="roundRect">
@@ -16367,7 +15429,7 @@
         </p:nvSpPr>
         <p:spPr>
           <a:xfrm>
-            <a:off x="4925695" y="2298700"/>
+            <a:off x="5402580" y="2215515"/>
             <a:ext cx="1489710" cy="1068705"/>
           </a:xfrm>
           <a:prstGeom prst="diamond">
@@ -16425,7 +15487,7 @@
         </p:nvCxnSpPr>
         <p:spPr>
           <a:xfrm flipH="1">
-            <a:off x="5668010" y="1123315"/>
+            <a:off x="6144895" y="1040130"/>
             <a:ext cx="5715" cy="385445"/>
           </a:xfrm>
           <a:prstGeom prst="straightConnector1">
@@ -16461,7 +15523,7 @@
         </p:nvCxnSpPr>
         <p:spPr>
           <a:xfrm>
-            <a:off x="5668010" y="1971675"/>
+            <a:off x="6144895" y="1888490"/>
             <a:ext cx="2540" cy="327025"/>
           </a:xfrm>
           <a:prstGeom prst="straightConnector1">
@@ -16494,7 +15556,7 @@
         </p:nvSpPr>
         <p:spPr>
           <a:xfrm rot="5400000">
-            <a:off x="5415280" y="3136265"/>
+            <a:off x="5892165" y="3053080"/>
             <a:ext cx="527685" cy="1612900"/>
           </a:xfrm>
           <a:prstGeom prst="roundRect">
@@ -16632,7 +15694,7 @@
         </p:nvCxnSpPr>
         <p:spPr>
           <a:xfrm>
-            <a:off x="5670550" y="3367405"/>
+            <a:off x="6147435" y="3284220"/>
             <a:ext cx="8890" cy="311785"/>
           </a:xfrm>
           <a:prstGeom prst="straightConnector1">
@@ -16667,7 +15729,7 @@
         </p:nvCxnSpPr>
         <p:spPr>
           <a:xfrm rot="10800000">
-            <a:off x="4424045" y="843280"/>
+            <a:off x="4900930" y="760095"/>
             <a:ext cx="501650" cy="1990090"/>
           </a:xfrm>
           <a:prstGeom prst="bentConnector2">
@@ -16697,7 +15759,7 @@
         </p:nvSpPr>
         <p:spPr>
           <a:xfrm>
-            <a:off x="4045585" y="1682115"/>
+            <a:off x="4522470" y="1598930"/>
             <a:ext cx="570865" cy="345440"/>
           </a:xfrm>
           <a:prstGeom prst="rect">
@@ -16732,7 +15794,7 @@
         </p:nvSpPr>
         <p:spPr>
           <a:xfrm>
-            <a:off x="5695950" y="3320415"/>
+            <a:off x="6172835" y="3237230"/>
             <a:ext cx="570865" cy="345440"/>
           </a:xfrm>
           <a:prstGeom prst="rect">
@@ -16772,7 +15834,7 @@
         </p:nvSpPr>
         <p:spPr>
           <a:xfrm rot="5400000">
-            <a:off x="5396230" y="4189095"/>
+            <a:off x="5873115" y="4105910"/>
             <a:ext cx="548005" cy="1346200"/>
           </a:xfrm>
           <a:prstGeom prst="roundRect">
@@ -16884,7 +15946,7 @@
         </p:nvSpPr>
         <p:spPr>
           <a:xfrm rot="5400000">
-            <a:off x="6569710" y="5469255"/>
+            <a:off x="7046595" y="5386070"/>
             <a:ext cx="1086485" cy="829310"/>
           </a:xfrm>
           <a:prstGeom prst="roundRect">
@@ -16977,7 +16039,7 @@
         </p:nvSpPr>
         <p:spPr>
           <a:xfrm>
-            <a:off x="4987290" y="5442585"/>
+            <a:off x="5464175" y="5359400"/>
             <a:ext cx="1386840" cy="899160"/>
           </a:xfrm>
           <a:prstGeom prst="diamond">
@@ -17052,7 +16114,7 @@
         </p:nvSpPr>
         <p:spPr>
           <a:xfrm>
-            <a:off x="7744460" y="4149725"/>
+            <a:off x="8221345" y="4066540"/>
             <a:ext cx="880110" cy="345440"/>
           </a:xfrm>
           <a:prstGeom prst="rect">
@@ -17094,7 +16156,7 @@
         </p:nvSpPr>
         <p:spPr>
           <a:xfrm>
-            <a:off x="7744460" y="3845560"/>
+            <a:off x="8221345" y="3762375"/>
             <a:ext cx="570865" cy="345440"/>
           </a:xfrm>
           <a:prstGeom prst="rect">
@@ -17132,7 +16194,7 @@
         </p:nvCxnSpPr>
         <p:spPr>
           <a:xfrm flipH="1">
-            <a:off x="5670550" y="4206875"/>
+            <a:off x="6147435" y="4123690"/>
             <a:ext cx="8890" cy="381635"/>
           </a:xfrm>
           <a:prstGeom prst="straightConnector1">
@@ -17165,7 +16227,7 @@
         </p:nvCxnSpPr>
         <p:spPr>
           <a:xfrm>
-            <a:off x="4413885" y="853440"/>
+            <a:off x="4890770" y="770255"/>
             <a:ext cx="335280" cy="0"/>
           </a:xfrm>
           <a:prstGeom prst="straightConnector1">
@@ -17201,7 +16263,7 @@
         </p:nvCxnSpPr>
         <p:spPr>
           <a:xfrm>
-            <a:off x="5670550" y="5136515"/>
+            <a:off x="6147435" y="5053330"/>
             <a:ext cx="10160" cy="306070"/>
           </a:xfrm>
           <a:prstGeom prst="straightConnector1">
@@ -17237,7 +16299,7 @@
         </p:nvCxnSpPr>
         <p:spPr>
           <a:xfrm flipV="1">
-            <a:off x="6374130" y="5884545"/>
+            <a:off x="6851015" y="5801360"/>
             <a:ext cx="324485" cy="7620"/>
           </a:xfrm>
           <a:prstGeom prst="straightConnector1">
@@ -17270,7 +16332,7 @@
         </p:nvSpPr>
         <p:spPr>
           <a:xfrm>
-            <a:off x="6732905" y="4730115"/>
+            <a:off x="7209790" y="4646930"/>
             <a:ext cx="570865" cy="345440"/>
           </a:xfrm>
           <a:prstGeom prst="rect">
@@ -17305,7 +16367,7 @@
         </p:nvSpPr>
         <p:spPr>
           <a:xfrm rot="5400000">
-            <a:off x="5210810" y="2322830"/>
+            <a:off x="5687695" y="2239645"/>
             <a:ext cx="3815080" cy="359410"/>
           </a:xfrm>
           <a:prstGeom prst="roundRect">
@@ -17409,7 +16471,7 @@
         </p:nvCxnSpPr>
         <p:spPr>
           <a:xfrm flipV="1">
-            <a:off x="7113270" y="4410075"/>
+            <a:off x="7590155" y="4326890"/>
             <a:ext cx="5080" cy="930910"/>
           </a:xfrm>
           <a:prstGeom prst="straightConnector1">
@@ -17434,681 +16496,6 @@
           </a:fontRef>
         </p:style>
       </p:cxnSp>
-      <p:grpSp>
-        <p:nvGrpSpPr>
-          <p:cNvPr id="5" name="组合 4"/>
-          <p:cNvGrpSpPr/>
-          <p:nvPr/>
-        </p:nvGrpSpPr>
-        <p:grpSpPr>
-          <a:xfrm rot="16200000">
-            <a:off x="-848042" y="2255203"/>
-            <a:ext cx="6304915" cy="2585720"/>
-            <a:chOff x="2963" y="7316"/>
-            <a:chExt cx="9929" cy="4072"/>
-          </a:xfrm>
-        </p:grpSpPr>
-        <p:sp>
-          <p:nvSpPr>
-            <p:cNvPr id="220" name="圆角矩形 219"/>
-            <p:cNvSpPr/>
-            <p:nvPr/>
-          </p:nvSpPr>
-          <p:spPr>
-            <a:xfrm>
-              <a:off x="2963" y="7316"/>
-              <a:ext cx="9929" cy="4072"/>
-            </a:xfrm>
-            <a:prstGeom prst="roundRect">
-              <a:avLst/>
-            </a:prstGeom>
-            <a:solidFill>
-              <a:srgbClr val="FFD966"/>
-            </a:solidFill>
-          </p:spPr>
-          <p:style>
-            <a:lnRef idx="2">
-              <a:schemeClr val="accent1">
-                <a:lumMod val="75000"/>
-              </a:schemeClr>
-            </a:lnRef>
-            <a:fillRef idx="1">
-              <a:schemeClr val="accent1"/>
-            </a:fillRef>
-            <a:effectRef idx="0">
-              <a:srgbClr val="FFFFFF"/>
-            </a:effectRef>
-            <a:fontRef idx="minor">
-              <a:schemeClr val="lt1"/>
-            </a:fontRef>
-          </p:style>
-          <p:txBody>
-            <a:bodyPr rtlCol="0" anchor="ctr"/>
-            <a:p>
-              <a:pPr algn="ctr"/>
-              <a:endParaRPr lang="zh-CN" altLang="en-US"/>
-            </a:p>
-          </p:txBody>
-        </p:sp>
-        <p:sp>
-          <p:nvSpPr>
-            <p:cNvPr id="224" name="圆角矩形 223"/>
-            <p:cNvSpPr/>
-            <p:nvPr/>
-          </p:nvSpPr>
-          <p:spPr>
-            <a:xfrm rot="5400000">
-              <a:off x="7614" y="8253"/>
-              <a:ext cx="665" cy="2078"/>
-            </a:xfrm>
-            <a:prstGeom prst="roundRect">
-              <a:avLst/>
-            </a:prstGeom>
-            <a:solidFill>
-              <a:schemeClr val="accent2"/>
-            </a:solidFill>
-          </p:spPr>
-          <p:style>
-            <a:lnRef idx="2">
-              <a:schemeClr val="accent1">
-                <a:lumMod val="75000"/>
-              </a:schemeClr>
-            </a:lnRef>
-            <a:fillRef idx="1">
-              <a:schemeClr val="accent1"/>
-            </a:fillRef>
-            <a:effectRef idx="0">
-              <a:srgbClr val="FFFFFF"/>
-            </a:effectRef>
-            <a:fontRef idx="minor">
-              <a:schemeClr val="lt1"/>
-            </a:fontRef>
-          </p:style>
-          <p:txBody>
-            <a:bodyPr rtlCol="0" anchor="ctr"/>
-            <a:p>
-              <a:pPr algn="ctr"/>
-              <a:r>
-                <a:rPr lang="zh-CN" altLang="en-US"/>
-                <a:t>全身姿态</a:t>
-              </a:r>
-              <a:endParaRPr lang="zh-CN" altLang="en-US"/>
-            </a:p>
-          </p:txBody>
-        </p:sp>
-        <p:cxnSp>
-          <p:nvCxnSpPr>
-            <p:cNvPr id="226" name="直接箭头连接符 225"/>
-            <p:cNvCxnSpPr>
-              <a:stCxn id="230" idx="3"/>
-            </p:cNvCxnSpPr>
-            <p:nvPr/>
-          </p:nvCxnSpPr>
-          <p:spPr>
-            <a:xfrm>
-              <a:off x="7941" y="8162"/>
-              <a:ext cx="3" cy="770"/>
-            </a:xfrm>
-            <a:prstGeom prst="straightConnector1">
-              <a:avLst/>
-            </a:prstGeom>
-            <a:ln>
-              <a:tailEnd type="arrow" w="med" len="med"/>
-            </a:ln>
-          </p:spPr>
-          <p:style>
-            <a:lnRef idx="3">
-              <a:schemeClr val="accent1"/>
-            </a:lnRef>
-            <a:fillRef idx="0">
-              <a:srgbClr val="FFFFFF"/>
-            </a:fillRef>
-            <a:effectRef idx="0">
-              <a:srgbClr val="FFFFFF"/>
-            </a:effectRef>
-            <a:fontRef idx="minor">
-              <a:schemeClr val="tx1"/>
-            </a:fontRef>
-          </p:style>
-        </p:cxnSp>
-        <p:sp>
-          <p:nvSpPr>
-            <p:cNvPr id="230" name="圆角矩形 229"/>
-            <p:cNvSpPr/>
-            <p:nvPr/>
-          </p:nvSpPr>
-          <p:spPr>
-            <a:xfrm rot="5400000">
-              <a:off x="7617" y="6902"/>
-              <a:ext cx="648" cy="1871"/>
-            </a:xfrm>
-            <a:prstGeom prst="roundRect">
-              <a:avLst/>
-            </a:prstGeom>
-            <a:solidFill>
-              <a:schemeClr val="accent6"/>
-            </a:solidFill>
-          </p:spPr>
-          <p:style>
-            <a:lnRef idx="2">
-              <a:schemeClr val="accent1">
-                <a:lumMod val="75000"/>
-              </a:schemeClr>
-            </a:lnRef>
-            <a:fillRef idx="1">
-              <a:schemeClr val="accent1"/>
-            </a:fillRef>
-            <a:effectRef idx="0">
-              <a:srgbClr val="FFFFFF"/>
-            </a:effectRef>
-            <a:fontRef idx="minor">
-              <a:schemeClr val="lt1"/>
-            </a:fontRef>
-          </p:style>
-          <p:txBody>
-            <a:bodyPr rtlCol="0" anchor="ctr"/>
-            <a:p>
-              <a:pPr algn="ctr"/>
-              <a:r>
-                <a:rPr lang="zh-CN" altLang="en-US"/>
-                <a:t>输入</a:t>
-              </a:r>
-              <a:endParaRPr lang="zh-CN" altLang="en-US"/>
-            </a:p>
-          </p:txBody>
-        </p:sp>
-        <p:cxnSp>
-          <p:nvCxnSpPr>
-            <p:cNvPr id="231" name="肘形连接符 230"/>
-            <p:cNvCxnSpPr>
-              <a:endCxn id="6" idx="1"/>
-            </p:cNvCxnSpPr>
-            <p:nvPr/>
-          </p:nvCxnSpPr>
-          <p:spPr>
-            <a:xfrm>
-              <a:off x="7988" y="8473"/>
-              <a:ext cx="2978" cy="487"/>
-            </a:xfrm>
-            <a:prstGeom prst="bentConnector2">
-              <a:avLst/>
-            </a:prstGeom>
-            <a:ln>
-              <a:tailEnd type="arrow" w="med" len="med"/>
-            </a:ln>
-          </p:spPr>
-          <p:style>
-            <a:lnRef idx="3">
-              <a:schemeClr val="accent1"/>
-            </a:lnRef>
-            <a:fillRef idx="0">
-              <a:srgbClr val="FFFFFF"/>
-            </a:fillRef>
-            <a:effectRef idx="0">
-              <a:srgbClr val="FFFFFF"/>
-            </a:effectRef>
-            <a:fontRef idx="minor">
-              <a:schemeClr val="tx1"/>
-            </a:fontRef>
-          </p:style>
-        </p:cxnSp>
-        <p:cxnSp>
-          <p:nvCxnSpPr>
-            <p:cNvPr id="232" name="肘形连接符 231"/>
-            <p:cNvCxnSpPr>
-              <a:endCxn id="7" idx="1"/>
-            </p:cNvCxnSpPr>
-            <p:nvPr/>
-          </p:nvCxnSpPr>
-          <p:spPr>
-            <a:xfrm rot="10800000" flipV="1">
-              <a:off x="4876" y="8472"/>
-              <a:ext cx="3072" cy="488"/>
-            </a:xfrm>
-            <a:prstGeom prst="bentConnector2">
-              <a:avLst/>
-            </a:prstGeom>
-            <a:ln>
-              <a:tailEnd type="arrow" w="med" len="med"/>
-            </a:ln>
-          </p:spPr>
-          <p:style>
-            <a:lnRef idx="3">
-              <a:schemeClr val="accent1"/>
-            </a:lnRef>
-            <a:fillRef idx="0">
-              <a:srgbClr val="FFFFFF"/>
-            </a:fillRef>
-            <a:effectRef idx="0">
-              <a:srgbClr val="FFFFFF"/>
-            </a:effectRef>
-            <a:fontRef idx="minor">
-              <a:schemeClr val="tx1"/>
-            </a:fontRef>
-          </p:style>
-        </p:cxnSp>
-        <p:sp>
-          <p:nvSpPr>
-            <p:cNvPr id="233" name="圆角矩形 232"/>
-            <p:cNvSpPr/>
-            <p:nvPr/>
-          </p:nvSpPr>
-          <p:spPr>
-            <a:xfrm rot="5400000">
-              <a:off x="7618" y="9946"/>
-              <a:ext cx="649" cy="1761"/>
-            </a:xfrm>
-            <a:prstGeom prst="roundRect">
-              <a:avLst/>
-            </a:prstGeom>
-            <a:solidFill>
-              <a:schemeClr val="accent6"/>
-            </a:solidFill>
-          </p:spPr>
-          <p:style>
-            <a:lnRef idx="2">
-              <a:schemeClr val="accent1">
-                <a:lumMod val="75000"/>
-              </a:schemeClr>
-            </a:lnRef>
-            <a:fillRef idx="1">
-              <a:schemeClr val="accent1"/>
-            </a:fillRef>
-            <a:effectRef idx="0">
-              <a:srgbClr val="FFFFFF"/>
-            </a:effectRef>
-            <a:fontRef idx="minor">
-              <a:schemeClr val="lt1"/>
-            </a:fontRef>
-          </p:style>
-          <p:txBody>
-            <a:bodyPr rtlCol="0" anchor="ctr"/>
-            <a:p>
-              <a:pPr algn="ctr"/>
-              <a:r>
-                <a:rPr lang="zh-CN" altLang="en-US"/>
-                <a:t>输</a:t>
-              </a:r>
-              <a:r>
-                <a:rPr lang="zh-CN" altLang="en-US"/>
-                <a:t>出</a:t>
-              </a:r>
-              <a:endParaRPr lang="zh-CN" altLang="en-US"/>
-            </a:p>
-          </p:txBody>
-        </p:sp>
-        <p:sp>
-          <p:nvSpPr>
-            <p:cNvPr id="240" name="流程图: 汇总连接 239"/>
-            <p:cNvSpPr/>
-            <p:nvPr/>
-          </p:nvSpPr>
-          <p:spPr>
-            <a:xfrm>
-              <a:off x="7814" y="9891"/>
-              <a:ext cx="269" cy="235"/>
-            </a:xfrm>
-            <a:prstGeom prst="flowChartSummingJunction">
-              <a:avLst/>
-            </a:prstGeom>
-            <a:noFill/>
-            <a:ln>
-              <a:solidFill>
-                <a:schemeClr val="tx1"/>
-              </a:solidFill>
-            </a:ln>
-          </p:spPr>
-          <p:style>
-            <a:lnRef idx="2">
-              <a:schemeClr val="accent1">
-                <a:shade val="50000"/>
-              </a:schemeClr>
-            </a:lnRef>
-            <a:fillRef idx="1">
-              <a:schemeClr val="accent1"/>
-            </a:fillRef>
-            <a:effectRef idx="0">
-              <a:schemeClr val="accent1"/>
-            </a:effectRef>
-            <a:fontRef idx="minor">
-              <a:schemeClr val="lt1"/>
-            </a:fontRef>
-          </p:style>
-          <p:txBody>
-            <a:bodyPr rtlCol="0" anchor="ctr"/>
-            <a:lstStyle/>
-            <a:p>
-              <a:pPr algn="ctr"/>
-              <a:endParaRPr lang="zh-CN" altLang="en-US" sz="2115">
-                <a:latin typeface="Times New Roman" panose="02020603050405020304" charset="0"/>
-                <a:cs typeface="Times New Roman" panose="02020603050405020304" charset="0"/>
-              </a:endParaRPr>
-            </a:p>
-          </p:txBody>
-        </p:sp>
-        <p:cxnSp>
-          <p:nvCxnSpPr>
-            <p:cNvPr id="247" name="直接箭头连接符 246"/>
-            <p:cNvCxnSpPr>
-              <a:stCxn id="240" idx="4"/>
-              <a:endCxn id="233" idx="1"/>
-            </p:cNvCxnSpPr>
-            <p:nvPr/>
-          </p:nvCxnSpPr>
-          <p:spPr>
-            <a:xfrm flipH="1">
-              <a:off x="7942" y="10126"/>
-              <a:ext cx="7" cy="376"/>
-            </a:xfrm>
-            <a:prstGeom prst="straightConnector1">
-              <a:avLst/>
-            </a:prstGeom>
-            <a:ln>
-              <a:tailEnd type="arrow" w="med" len="med"/>
-            </a:ln>
-          </p:spPr>
-          <p:style>
-            <a:lnRef idx="3">
-              <a:schemeClr val="accent1"/>
-            </a:lnRef>
-            <a:fillRef idx="0">
-              <a:srgbClr val="FFFFFF"/>
-            </a:fillRef>
-            <a:effectRef idx="0">
-              <a:srgbClr val="FFFFFF"/>
-            </a:effectRef>
-            <a:fontRef idx="minor">
-              <a:schemeClr val="tx1"/>
-            </a:fontRef>
-          </p:style>
-        </p:cxnSp>
-        <p:cxnSp>
-          <p:nvCxnSpPr>
-            <p:cNvPr id="248" name="直接连接符 247"/>
-            <p:cNvCxnSpPr>
-              <a:stCxn id="224" idx="3"/>
-              <a:endCxn id="240" idx="0"/>
-            </p:cNvCxnSpPr>
-            <p:nvPr/>
-          </p:nvCxnSpPr>
-          <p:spPr>
-            <a:xfrm>
-              <a:off x="7946" y="9625"/>
-              <a:ext cx="3" cy="266"/>
-            </a:xfrm>
-            <a:prstGeom prst="line">
-              <a:avLst/>
-            </a:prstGeom>
-          </p:spPr>
-          <p:style>
-            <a:lnRef idx="3">
-              <a:schemeClr val="accent1"/>
-            </a:lnRef>
-            <a:fillRef idx="0">
-              <a:srgbClr val="FFFFFF"/>
-            </a:fillRef>
-            <a:effectRef idx="0">
-              <a:srgbClr val="FFFFFF"/>
-            </a:effectRef>
-            <a:fontRef idx="minor">
-              <a:schemeClr val="tx1"/>
-            </a:fontRef>
-          </p:style>
-        </p:cxnSp>
-        <p:cxnSp>
-          <p:nvCxnSpPr>
-            <p:cNvPr id="250" name="肘形连接符 249"/>
-            <p:cNvCxnSpPr>
-              <a:stCxn id="7" idx="3"/>
-              <a:endCxn id="240" idx="2"/>
-            </p:cNvCxnSpPr>
-            <p:nvPr/>
-          </p:nvCxnSpPr>
-          <p:spPr>
-            <a:xfrm rot="5400000" flipV="1">
-              <a:off x="6153" y="8348"/>
-              <a:ext cx="384" cy="2938"/>
-            </a:xfrm>
-            <a:prstGeom prst="bentConnector2">
-              <a:avLst/>
-            </a:prstGeom>
-          </p:spPr>
-          <p:style>
-            <a:lnRef idx="3">
-              <a:schemeClr val="accent1"/>
-            </a:lnRef>
-            <a:fillRef idx="0">
-              <a:srgbClr val="FFFFFF"/>
-            </a:fillRef>
-            <a:effectRef idx="0">
-              <a:srgbClr val="FFFFFF"/>
-            </a:effectRef>
-            <a:fontRef idx="minor">
-              <a:schemeClr val="tx1"/>
-            </a:fontRef>
-          </p:style>
-        </p:cxnSp>
-        <p:cxnSp>
-          <p:nvCxnSpPr>
-            <p:cNvPr id="251" name="肘形连接符 250"/>
-            <p:cNvCxnSpPr>
-              <a:stCxn id="6" idx="3"/>
-              <a:endCxn id="240" idx="6"/>
-            </p:cNvCxnSpPr>
-            <p:nvPr/>
-          </p:nvCxnSpPr>
-          <p:spPr>
-            <a:xfrm rot="5400000">
-              <a:off x="9333" y="8376"/>
-              <a:ext cx="384" cy="2883"/>
-            </a:xfrm>
-            <a:prstGeom prst="bentConnector2">
-              <a:avLst/>
-            </a:prstGeom>
-          </p:spPr>
-          <p:style>
-            <a:lnRef idx="3">
-              <a:schemeClr val="accent1"/>
-            </a:lnRef>
-            <a:fillRef idx="0">
-              <a:srgbClr val="FFFFFF"/>
-            </a:fillRef>
-            <a:effectRef idx="0">
-              <a:srgbClr val="FFFFFF"/>
-            </a:effectRef>
-            <a:fontRef idx="minor">
-              <a:schemeClr val="tx1"/>
-            </a:fontRef>
-          </p:style>
-        </p:cxnSp>
-        <p:sp>
-          <p:nvSpPr>
-            <p:cNvPr id="2" name="文本框 1"/>
-            <p:cNvSpPr txBox="1"/>
-            <p:nvPr/>
-          </p:nvSpPr>
-          <p:spPr>
-            <a:xfrm rot="5400000">
-              <a:off x="3954" y="8141"/>
-              <a:ext cx="545" cy="988"/>
-            </a:xfrm>
-            <a:prstGeom prst="rect">
-              <a:avLst/>
-            </a:prstGeom>
-            <a:noFill/>
-          </p:spPr>
-          <p:txBody>
-            <a:bodyPr wrap="square" rtlCol="0">
-              <a:noAutofit/>
-            </a:bodyPr>
-            <a:p>
-              <a:r>
-                <a:rPr lang="zh-CN" altLang="en-US"/>
-                <a:t>背</a:t>
-              </a:r>
-              <a:r>
-                <a:rPr lang="zh-CN" altLang="en-US"/>
-                <a:t>部</a:t>
-              </a:r>
-              <a:endParaRPr lang="zh-CN" altLang="en-US"/>
-            </a:p>
-          </p:txBody>
-        </p:sp>
-        <p:sp>
-          <p:nvSpPr>
-            <p:cNvPr id="3" name="文本框 2"/>
-            <p:cNvSpPr txBox="1"/>
-            <p:nvPr/>
-          </p:nvSpPr>
-          <p:spPr>
-            <a:xfrm rot="5400000">
-              <a:off x="7125" y="8140"/>
-              <a:ext cx="526" cy="1018"/>
-            </a:xfrm>
-            <a:prstGeom prst="rect">
-              <a:avLst/>
-            </a:prstGeom>
-            <a:noFill/>
-          </p:spPr>
-          <p:txBody>
-            <a:bodyPr wrap="square" rtlCol="0">
-              <a:noAutofit/>
-            </a:bodyPr>
-            <a:p>
-              <a:r>
-                <a:rPr lang="zh-CN" altLang="en-US"/>
-                <a:t>腹部</a:t>
-              </a:r>
-              <a:endParaRPr lang="zh-CN" altLang="en-US"/>
-            </a:p>
-          </p:txBody>
-        </p:sp>
-        <p:sp>
-          <p:nvSpPr>
-            <p:cNvPr id="4" name="文本框 3"/>
-            <p:cNvSpPr txBox="1"/>
-            <p:nvPr/>
-          </p:nvSpPr>
-          <p:spPr>
-            <a:xfrm rot="5400000">
-              <a:off x="11125" y="8084"/>
-              <a:ext cx="558" cy="1176"/>
-            </a:xfrm>
-            <a:prstGeom prst="rect">
-              <a:avLst/>
-            </a:prstGeom>
-            <a:noFill/>
-          </p:spPr>
-          <p:txBody>
-            <a:bodyPr wrap="square" rtlCol="0">
-              <a:noAutofit/>
-            </a:bodyPr>
-            <a:p>
-              <a:r>
-                <a:rPr lang="zh-CN" altLang="en-US"/>
-                <a:t>脐部</a:t>
-              </a:r>
-              <a:endParaRPr lang="zh-CN" altLang="en-US"/>
-            </a:p>
-          </p:txBody>
-        </p:sp>
-      </p:grpSp>
-      <p:sp>
-        <p:nvSpPr>
-          <p:cNvPr id="6" name="圆角矩形 5"/>
-          <p:cNvSpPr/>
-          <p:nvPr/>
-        </p:nvSpPr>
-        <p:spPr>
-          <a:xfrm rot="21600000">
-            <a:off x="2055495" y="584200"/>
-            <a:ext cx="422275" cy="2068195"/>
-          </a:xfrm>
-          <a:prstGeom prst="roundRect">
-            <a:avLst/>
-          </a:prstGeom>
-          <a:solidFill>
-            <a:schemeClr val="accent2"/>
-          </a:solidFill>
-        </p:spPr>
-        <p:style>
-          <a:lnRef idx="2">
-            <a:schemeClr val="accent1">
-              <a:lumMod val="75000"/>
-            </a:schemeClr>
-          </a:lnRef>
-          <a:fillRef idx="1">
-            <a:schemeClr val="accent1"/>
-          </a:fillRef>
-          <a:effectRef idx="0">
-            <a:srgbClr val="FFFFFF"/>
-          </a:effectRef>
-          <a:fontRef idx="minor">
-            <a:schemeClr val="lt1"/>
-          </a:fontRef>
-        </p:style>
-        <p:txBody>
-          <a:bodyPr rtlCol="0" anchor="ctr"/>
-          <a:p>
-            <a:pPr algn="ctr"/>
-            <a:r>
-              <a:rPr lang="zh-CN" altLang="en-US">
-                <a:sym typeface="+mn-ea"/>
-              </a:rPr>
-              <a:t>全身姿态+脐点</a:t>
-            </a:r>
-            <a:endParaRPr lang="zh-CN" altLang="en-US"/>
-          </a:p>
-        </p:txBody>
-      </p:sp>
-      <p:sp>
-        <p:nvSpPr>
-          <p:cNvPr id="7" name="圆角矩形 6"/>
-          <p:cNvSpPr/>
-          <p:nvPr/>
-        </p:nvSpPr>
-        <p:spPr>
-          <a:xfrm rot="21600000">
-            <a:off x="2055495" y="4451350"/>
-            <a:ext cx="422275" cy="2068195"/>
-          </a:xfrm>
-          <a:prstGeom prst="roundRect">
-            <a:avLst/>
-          </a:prstGeom>
-          <a:solidFill>
-            <a:schemeClr val="accent2"/>
-          </a:solidFill>
-        </p:spPr>
-        <p:style>
-          <a:lnRef idx="2">
-            <a:schemeClr val="accent1">
-              <a:lumMod val="75000"/>
-            </a:schemeClr>
-          </a:lnRef>
-          <a:fillRef idx="1">
-            <a:schemeClr val="accent1"/>
-          </a:fillRef>
-          <a:effectRef idx="0">
-            <a:srgbClr val="FFFFFF"/>
-          </a:effectRef>
-          <a:fontRef idx="minor">
-            <a:schemeClr val="lt1"/>
-          </a:fontRef>
-        </p:style>
-        <p:txBody>
-          <a:bodyPr rtlCol="0" anchor="ctr"/>
-          <a:p>
-            <a:pPr algn="ctr"/>
-            <a:r>
-              <a:rPr lang="zh-CN" altLang="en-US">
-                <a:sym typeface="+mn-ea"/>
-              </a:rPr>
-              <a:t>全身姿态+颈点</a:t>
-            </a:r>
-            <a:endParaRPr lang="zh-CN" altLang="en-US"/>
-          </a:p>
-        </p:txBody>
-      </p:sp>
       <p:cxnSp>
         <p:nvCxnSpPr>
           <p:cNvPr id="8" name="肘形连接符 7"/>
@@ -18120,7 +16507,7 @@
         </p:nvCxnSpPr>
         <p:spPr>
           <a:xfrm flipH="1" flipV="1">
-            <a:off x="7298055" y="2502535"/>
+            <a:off x="7774940" y="2419350"/>
             <a:ext cx="229870" cy="3382010"/>
           </a:xfrm>
           <a:prstGeom prst="bentConnector3">
@@ -18147,6 +16534,189 @@
           </a:fontRef>
         </p:style>
       </p:cxnSp>
+      <p:sp>
+        <p:nvSpPr>
+          <p:cNvPr id="11" name="文本框 10"/>
+          <p:cNvSpPr txBox="1"/>
+          <p:nvPr/>
+        </p:nvSpPr>
+        <p:spPr>
+          <a:xfrm>
+            <a:off x="1010920" y="6855460"/>
+            <a:ext cx="2586355" cy="485775"/>
+          </a:xfrm>
+          <a:prstGeom prst="rect">
+            <a:avLst/>
+          </a:prstGeom>
+          <a:noFill/>
+        </p:spPr>
+        <p:txBody>
+          <a:bodyPr wrap="square" rtlCol="0">
+            <a:noAutofit/>
+          </a:bodyPr>
+          <a:p>
+            <a:pPr algn="ctr"/>
+            <a:r>
+              <a:rPr lang="zh-CN" altLang="en-US"/>
+              <a:t>（</a:t>
+            </a:r>
+            <a:r>
+              <a:rPr lang="en-US" altLang="zh-CN"/>
+              <a:t>a</a:t>
+            </a:r>
+            <a:r>
+              <a:rPr lang="zh-CN" altLang="en-US"/>
+              <a:t>）部位</a:t>
+            </a:r>
+            <a:r>
+              <a:rPr lang="zh-CN" altLang="en-US"/>
+              <a:t>路由</a:t>
+            </a:r>
+            <a:endParaRPr lang="zh-CN" altLang="en-US"/>
+          </a:p>
+        </p:txBody>
+      </p:sp>
+      <p:sp>
+        <p:nvSpPr>
+          <p:cNvPr id="12" name="文本框 11"/>
+          <p:cNvSpPr txBox="1"/>
+          <p:nvPr/>
+        </p:nvSpPr>
+        <p:spPr>
+          <a:xfrm>
+            <a:off x="4248150" y="6854825"/>
+            <a:ext cx="4852670" cy="486410"/>
+          </a:xfrm>
+          <a:prstGeom prst="rect">
+            <a:avLst/>
+          </a:prstGeom>
+          <a:noFill/>
+        </p:spPr>
+        <p:txBody>
+          <a:bodyPr wrap="square" rtlCol="0">
+            <a:noAutofit/>
+          </a:bodyPr>
+          <a:p>
+            <a:pPr algn="ctr"/>
+            <a:r>
+              <a:rPr lang="zh-CN" altLang="en-US"/>
+              <a:t>（</a:t>
+            </a:r>
+            <a:r>
+              <a:rPr lang="en-US" altLang="zh-CN"/>
+              <a:t>b</a:t>
+            </a:r>
+            <a:r>
+              <a:rPr lang="zh-CN" altLang="en-US"/>
+              <a:t>）总流程</a:t>
+            </a:r>
+            <a:endParaRPr lang="zh-CN" altLang="en-US"/>
+          </a:p>
+        </p:txBody>
+      </p:sp>
+      <p:cxnSp>
+        <p:nvCxnSpPr>
+          <p:cNvPr id="13" name="直接连接符 12"/>
+          <p:cNvCxnSpPr>
+            <a:endCxn id="96" idx="1"/>
+          </p:cNvCxnSpPr>
+          <p:nvPr/>
+        </p:nvCxnSpPr>
+        <p:spPr>
+          <a:xfrm>
+            <a:off x="3377565" y="241300"/>
+            <a:ext cx="2767965" cy="1184275"/>
+          </a:xfrm>
+          <a:prstGeom prst="line">
+            <a:avLst/>
+          </a:prstGeom>
+          <a:ln w="6350" cap="flat" cmpd="sng" algn="ctr">
+            <a:solidFill>
+              <a:schemeClr val="accent1"/>
+            </a:solidFill>
+            <a:prstDash val="dash"/>
+            <a:miter lim="800000"/>
+          </a:ln>
+        </p:spPr>
+        <p:style>
+          <a:lnRef idx="0">
+            <a:schemeClr val="accent1"/>
+          </a:lnRef>
+          <a:fillRef idx="0">
+            <a:srgbClr val="FFFFFF"/>
+          </a:fillRef>
+          <a:effectRef idx="0">
+            <a:srgbClr val="FFFFFF"/>
+          </a:effectRef>
+          <a:fontRef idx="minor">
+            <a:schemeClr val="tx1"/>
+          </a:fontRef>
+        </p:style>
+      </p:cxnSp>
+      <p:cxnSp>
+        <p:nvCxnSpPr>
+          <p:cNvPr id="14" name="直接连接符 13"/>
+          <p:cNvCxnSpPr>
+            <a:stCxn id="96" idx="3"/>
+          </p:cNvCxnSpPr>
+          <p:nvPr/>
+        </p:nvCxnSpPr>
+        <p:spPr>
+          <a:xfrm flipH="1">
+            <a:off x="3476625" y="1888490"/>
+            <a:ext cx="2668905" cy="4784725"/>
+          </a:xfrm>
+          <a:prstGeom prst="line">
+            <a:avLst/>
+          </a:prstGeom>
+          <a:ln w="6350" cap="flat" cmpd="sng" algn="ctr">
+            <a:solidFill>
+              <a:schemeClr val="accent1"/>
+            </a:solidFill>
+            <a:prstDash val="dash"/>
+            <a:miter lim="800000"/>
+          </a:ln>
+        </p:spPr>
+        <p:style>
+          <a:lnRef idx="0">
+            <a:schemeClr val="accent1"/>
+          </a:lnRef>
+          <a:fillRef idx="0">
+            <a:srgbClr val="FFFFFF"/>
+          </a:fillRef>
+          <a:effectRef idx="0">
+            <a:srgbClr val="FFFFFF"/>
+          </a:effectRef>
+          <a:fontRef idx="minor">
+            <a:schemeClr val="tx1"/>
+          </a:fontRef>
+        </p:style>
+      </p:cxnSp>
+      <p:sp>
+        <p:nvSpPr>
+          <p:cNvPr id="15" name="文本框 14"/>
+          <p:cNvSpPr txBox="1"/>
+          <p:nvPr/>
+        </p:nvSpPr>
+        <p:spPr>
+          <a:xfrm>
+            <a:off x="0" y="6963410"/>
+            <a:ext cx="10043795" cy="415290"/>
+          </a:xfrm>
+          <a:prstGeom prst="rect">
+            <a:avLst/>
+          </a:prstGeom>
+          <a:noFill/>
+        </p:spPr>
+        <p:txBody>
+          <a:bodyPr wrap="square" rtlCol="0">
+            <a:noAutofit/>
+          </a:bodyPr>
+          <a:p>
+            <a:endParaRPr lang="zh-CN" altLang="en-US"/>
+          </a:p>
+        </p:txBody>
+      </p:sp>
     </p:spTree>
   </p:cSld>
   <p:clrMapOvr>
